--- a/proposals/2026-11_induk-ai-infra/발표자료.pptx
+++ b/proposals/2026-11_induk-ai-infra/발표자료.pptx
@@ -4832,7 +4832,7 @@
         <p:spPr>
           <a:xfrm>
             <a:off x="5660181" y="1260000"/>
-            <a:ext cx="1403754" cy="804340"/>
+            <a:ext cx="1403754" cy="2137888"/>
           </a:xfrm>
           <a:prstGeom prst="roundRect">
             <a:avLst>
@@ -4925,7 +4925,7 @@
               </a:spcAft>
             </a:pPr>
             <a:r>
-              <a:rPr sz="1207" b="1">
+              <a:rPr sz="1350" b="1">
                 <a:solidFill>
                   <a:srgbClr val="FFFFFF"/>
                 </a:solidFill>
@@ -4947,7 +4947,7 @@
         <p:spPr>
           <a:xfrm>
             <a:off x="5703381" y="1602000"/>
-            <a:ext cx="1317354" cy="444340"/>
+            <a:ext cx="1317354" cy="1777888"/>
           </a:xfrm>
           <a:prstGeom prst="rect">
             <a:avLst/>
@@ -4972,7 +4972,7 @@
               </a:spcAft>
             </a:pPr>
             <a:r>
-              <a:rPr sz="1150" b="0">
+              <a:rPr sz="1300" b="0">
                 <a:solidFill>
                   <a:srgbClr val="1F2A44"/>
                 </a:solidFill>
@@ -4993,7 +4993,7 @@
         </p:nvSpPr>
         <p:spPr>
           <a:xfrm>
-            <a:off x="7092736" y="1554170"/>
+            <a:off x="7092736" y="2220944"/>
             <a:ext cx="140400" cy="216000"/>
           </a:xfrm>
           <a:prstGeom prst="rightArrow">
@@ -5038,7 +5038,7 @@
         <p:spPr>
           <a:xfrm>
             <a:off x="7261936" y="1260000"/>
-            <a:ext cx="1403754" cy="804340"/>
+            <a:ext cx="1403754" cy="2137888"/>
           </a:xfrm>
           <a:prstGeom prst="roundRect">
             <a:avLst>
@@ -5131,7 +5131,7 @@
               </a:spcAft>
             </a:pPr>
             <a:r>
-              <a:rPr sz="1207" b="1">
+              <a:rPr sz="1350" b="1">
                 <a:solidFill>
                   <a:srgbClr val="FFFFFF"/>
                 </a:solidFill>
@@ -5153,7 +5153,7 @@
         <p:spPr>
           <a:xfrm>
             <a:off x="7305136" y="1602000"/>
-            <a:ext cx="1317354" cy="444340"/>
+            <a:ext cx="1317354" cy="1777888"/>
           </a:xfrm>
           <a:prstGeom prst="rect">
             <a:avLst/>
@@ -5178,7 +5178,7 @@
               </a:spcAft>
             </a:pPr>
             <a:r>
-              <a:rPr sz="1150" b="0">
+              <a:rPr sz="1300" b="0">
                 <a:solidFill>
                   <a:srgbClr val="1F2A44"/>
                 </a:solidFill>
@@ -5199,7 +5199,7 @@
         </p:nvSpPr>
         <p:spPr>
           <a:xfrm>
-            <a:off x="8694490" y="1554170"/>
+            <a:off x="8694490" y="2220944"/>
             <a:ext cx="140400" cy="216000"/>
           </a:xfrm>
           <a:prstGeom prst="rightArrow">
@@ -5244,7 +5244,7 @@
         <p:spPr>
           <a:xfrm>
             <a:off x="8863690" y="1260000"/>
-            <a:ext cx="1403754" cy="804340"/>
+            <a:ext cx="1403754" cy="2137888"/>
           </a:xfrm>
           <a:prstGeom prst="roundRect">
             <a:avLst>
@@ -5337,7 +5337,7 @@
               </a:spcAft>
             </a:pPr>
             <a:r>
-              <a:rPr sz="1207" b="1">
+              <a:rPr sz="1350" b="1">
                 <a:solidFill>
                   <a:srgbClr val="FFFFFF"/>
                 </a:solidFill>
@@ -5359,7 +5359,7 @@
         <p:spPr>
           <a:xfrm>
             <a:off x="8906890" y="1602000"/>
-            <a:ext cx="1317354" cy="444340"/>
+            <a:ext cx="1317354" cy="1777888"/>
           </a:xfrm>
           <a:prstGeom prst="rect">
             <a:avLst/>
@@ -5384,7 +5384,7 @@
               </a:spcAft>
             </a:pPr>
             <a:r>
-              <a:rPr sz="1150" b="0">
+              <a:rPr sz="1300" b="0">
                 <a:solidFill>
                   <a:srgbClr val="1F2A44"/>
                 </a:solidFill>
@@ -5405,7 +5405,7 @@
         </p:nvSpPr>
         <p:spPr>
           <a:xfrm>
-            <a:off x="10296245" y="1554170"/>
+            <a:off x="10296245" y="2220944"/>
             <a:ext cx="140400" cy="216000"/>
           </a:xfrm>
           <a:prstGeom prst="rightArrow">
@@ -5450,7 +5450,7 @@
         <p:spPr>
           <a:xfrm>
             <a:off x="10465445" y="1260000"/>
-            <a:ext cx="1403754" cy="804340"/>
+            <a:ext cx="1403754" cy="2137888"/>
           </a:xfrm>
           <a:prstGeom prst="roundRect">
             <a:avLst>
@@ -5543,7 +5543,7 @@
               </a:spcAft>
             </a:pPr>
             <a:r>
-              <a:rPr sz="1207" b="1">
+              <a:rPr sz="1350" b="1">
                 <a:solidFill>
                   <a:srgbClr val="FFFFFF"/>
                 </a:solidFill>
@@ -5565,7 +5565,7 @@
         <p:spPr>
           <a:xfrm>
             <a:off x="10508645" y="1602000"/>
-            <a:ext cx="1317354" cy="444340"/>
+            <a:ext cx="1317354" cy="1777888"/>
           </a:xfrm>
           <a:prstGeom prst="rect">
             <a:avLst/>
@@ -5590,7 +5590,7 @@
               </a:spcAft>
             </a:pPr>
             <a:r>
-              <a:rPr sz="1150" b="0">
+              <a:rPr sz="1300" b="0">
                 <a:solidFill>
                   <a:srgbClr val="1F2A44"/>
                 </a:solidFill>
@@ -5612,8 +5612,8 @@
           <p:nvPr/>
         </p:nvGraphicFramePr>
         <p:xfrm>
-          <a:off x="5660181" y="2172340"/>
-          <a:ext cx="6209017" cy="4307658"/>
+          <a:off x="5660181" y="3505888"/>
+          <a:ext cx="6209017" cy="2974110"/>
         </p:xfrm>
         <a:graphic>
           <a:graphicData uri="http://schemas.openxmlformats.org/drawingml/2006/table">
@@ -5623,7 +5623,7 @@
                 <a:gridCol w="1602327"/>
                 <a:gridCol w="4606690"/>
               </a:tblGrid>
-              <a:tr h="717943">
+              <a:tr h="495685">
                 <a:tc>
                   <a:txBody>
                     <a:bodyPr wrap="square"/>
@@ -5735,7 +5735,7 @@
                   </a:tcPr>
                 </a:tc>
               </a:tr>
-              <a:tr h="717943">
+              <a:tr h="495685">
                 <a:tc>
                   <a:txBody>
                     <a:bodyPr wrap="square"/>
@@ -5847,7 +5847,7 @@
                   </a:tcPr>
                 </a:tc>
               </a:tr>
-              <a:tr h="717943">
+              <a:tr h="495685">
                 <a:tc>
                   <a:txBody>
                     <a:bodyPr wrap="square"/>
@@ -5970,7 +5970,7 @@
                   </a:tcPr>
                 </a:tc>
               </a:tr>
-              <a:tr h="717943">
+              <a:tr h="495685">
                 <a:tc>
                   <a:txBody>
                     <a:bodyPr wrap="square"/>
@@ -6082,7 +6082,7 @@
                   </a:tcPr>
                 </a:tc>
               </a:tr>
-              <a:tr h="717943">
+              <a:tr h="495685">
                 <a:tc>
                   <a:txBody>
                     <a:bodyPr wrap="square"/>
@@ -6205,7 +6205,7 @@
                   </a:tcPr>
                 </a:tc>
               </a:tr>
-              <a:tr h="717943">
+              <a:tr h="495685">
                 <a:tc>
                   <a:txBody>
                     <a:bodyPr wrap="square"/>
@@ -6866,7 +6866,7 @@
         <p:spPr>
           <a:xfrm>
             <a:off x="324000" y="1260000"/>
-            <a:ext cx="2150640" cy="1007999"/>
+            <a:ext cx="2150640" cy="1931583"/>
           </a:xfrm>
           <a:prstGeom prst="roundRect">
             <a:avLst>
@@ -6959,7 +6959,7 @@
               </a:spcAft>
             </a:pPr>
             <a:r>
-              <a:rPr sz="1264" b="1">
+              <a:rPr sz="1415" b="1">
                 <a:solidFill>
                   <a:srgbClr val="FFFFFF"/>
                 </a:solidFill>
@@ -6981,7 +6981,7 @@
         <p:spPr>
           <a:xfrm>
             <a:off x="367200" y="1602000"/>
-            <a:ext cx="2064240" cy="647999"/>
+            <a:ext cx="2064240" cy="1571583"/>
           </a:xfrm>
           <a:prstGeom prst="rect">
             <a:avLst/>
@@ -7006,7 +7006,7 @@
               </a:spcAft>
             </a:pPr>
             <a:r>
-              <a:rPr sz="1207" b="0">
+              <a:rPr sz="1365" b="0">
                 <a:solidFill>
                   <a:srgbClr val="1F2A44"/>
                 </a:solidFill>
@@ -7027,7 +7027,7 @@
         </p:nvSpPr>
         <p:spPr>
           <a:xfrm>
-            <a:off x="2503440" y="1656000"/>
+            <a:off x="2503440" y="2117791"/>
             <a:ext cx="140400" cy="216000"/>
           </a:xfrm>
           <a:prstGeom prst="rightArrow">
@@ -7072,7 +7072,7 @@
         <p:spPr>
           <a:xfrm>
             <a:off x="2672640" y="1260000"/>
-            <a:ext cx="2150640" cy="1007999"/>
+            <a:ext cx="2150640" cy="1931583"/>
           </a:xfrm>
           <a:prstGeom prst="roundRect">
             <a:avLst>
@@ -7165,7 +7165,7 @@
               </a:spcAft>
             </a:pPr>
             <a:r>
-              <a:rPr sz="1264" b="1">
+              <a:rPr sz="1415" b="1">
                 <a:solidFill>
                   <a:srgbClr val="FFFFFF"/>
                 </a:solidFill>
@@ -7187,7 +7187,7 @@
         <p:spPr>
           <a:xfrm>
             <a:off x="2715840" y="1602000"/>
-            <a:ext cx="2064240" cy="647999"/>
+            <a:ext cx="2064240" cy="1571583"/>
           </a:xfrm>
           <a:prstGeom prst="rect">
             <a:avLst/>
@@ -7212,7 +7212,7 @@
               </a:spcAft>
             </a:pPr>
             <a:r>
-              <a:rPr sz="1207" b="0">
+              <a:rPr sz="1365" b="0">
                 <a:solidFill>
                   <a:srgbClr val="1F2A44"/>
                 </a:solidFill>
@@ -7233,7 +7233,7 @@
         </p:nvSpPr>
         <p:spPr>
           <a:xfrm>
-            <a:off x="4852080" y="1656000"/>
+            <a:off x="4852080" y="2117791"/>
             <a:ext cx="140400" cy="216000"/>
           </a:xfrm>
           <a:prstGeom prst="rightArrow">
@@ -7278,7 +7278,7 @@
         <p:spPr>
           <a:xfrm>
             <a:off x="5021280" y="1260000"/>
-            <a:ext cx="2150640" cy="1007999"/>
+            <a:ext cx="2150640" cy="1931583"/>
           </a:xfrm>
           <a:prstGeom prst="roundRect">
             <a:avLst>
@@ -7371,7 +7371,7 @@
               </a:spcAft>
             </a:pPr>
             <a:r>
-              <a:rPr sz="1264" b="1">
+              <a:rPr sz="1415" b="1">
                 <a:solidFill>
                   <a:srgbClr val="FFFFFF"/>
                 </a:solidFill>
@@ -7393,7 +7393,7 @@
         <p:spPr>
           <a:xfrm>
             <a:off x="5064480" y="1602000"/>
-            <a:ext cx="2064240" cy="647999"/>
+            <a:ext cx="2064240" cy="1571583"/>
           </a:xfrm>
           <a:prstGeom prst="rect">
             <a:avLst/>
@@ -7418,7 +7418,7 @@
               </a:spcAft>
             </a:pPr>
             <a:r>
-              <a:rPr sz="1207" b="0">
+              <a:rPr sz="1365" b="0">
                 <a:solidFill>
                   <a:srgbClr val="1F2A44"/>
                 </a:solidFill>
@@ -7439,7 +7439,7 @@
         </p:nvSpPr>
         <p:spPr>
           <a:xfrm>
-            <a:off x="7200720" y="1656000"/>
+            <a:off x="7200720" y="2117791"/>
             <a:ext cx="140400" cy="216000"/>
           </a:xfrm>
           <a:prstGeom prst="rightArrow">
@@ -7484,7 +7484,7 @@
         <p:spPr>
           <a:xfrm>
             <a:off x="7369919" y="1260000"/>
-            <a:ext cx="2150640" cy="1007999"/>
+            <a:ext cx="2150640" cy="1931583"/>
           </a:xfrm>
           <a:prstGeom prst="roundRect">
             <a:avLst>
@@ -7577,7 +7577,7 @@
               </a:spcAft>
             </a:pPr>
             <a:r>
-              <a:rPr sz="1264" b="1">
+              <a:rPr sz="1415" b="1">
                 <a:solidFill>
                   <a:srgbClr val="FFFFFF"/>
                 </a:solidFill>
@@ -7599,7 +7599,7 @@
         <p:spPr>
           <a:xfrm>
             <a:off x="7413120" y="1602000"/>
-            <a:ext cx="2064240" cy="647999"/>
+            <a:ext cx="2064240" cy="1571583"/>
           </a:xfrm>
           <a:prstGeom prst="rect">
             <a:avLst/>
@@ -7624,7 +7624,7 @@
               </a:spcAft>
             </a:pPr>
             <a:r>
-              <a:rPr sz="1207" b="0">
+              <a:rPr sz="1365" b="0">
                 <a:solidFill>
                   <a:srgbClr val="1F2A44"/>
                 </a:solidFill>
@@ -7645,7 +7645,7 @@
         </p:nvSpPr>
         <p:spPr>
           <a:xfrm>
-            <a:off x="9549359" y="1656000"/>
+            <a:off x="9549359" y="2117791"/>
             <a:ext cx="140400" cy="216000"/>
           </a:xfrm>
           <a:prstGeom prst="rightArrow">
@@ -7690,7 +7690,7 @@
         <p:spPr>
           <a:xfrm>
             <a:off x="9718560" y="1260000"/>
-            <a:ext cx="2150640" cy="1007999"/>
+            <a:ext cx="2150640" cy="1931583"/>
           </a:xfrm>
           <a:prstGeom prst="roundRect">
             <a:avLst>
@@ -7783,7 +7783,7 @@
               </a:spcAft>
             </a:pPr>
             <a:r>
-              <a:rPr sz="1264" b="1">
+              <a:rPr sz="1415" b="1">
                 <a:solidFill>
                   <a:srgbClr val="FFFFFF"/>
                 </a:solidFill>
@@ -7805,7 +7805,7 @@
         <p:spPr>
           <a:xfrm>
             <a:off x="9761760" y="1602000"/>
-            <a:ext cx="2064240" cy="647999"/>
+            <a:ext cx="2064240" cy="1571583"/>
           </a:xfrm>
           <a:prstGeom prst="rect">
             <a:avLst/>
@@ -7830,7 +7830,7 @@
               </a:spcAft>
             </a:pPr>
             <a:r>
-              <a:rPr sz="1207" b="0">
+              <a:rPr sz="1365" b="0">
                 <a:solidFill>
                   <a:srgbClr val="1F2A44"/>
                 </a:solidFill>
@@ -7852,8 +7852,8 @@
           <p:nvPr/>
         </p:nvGraphicFramePr>
         <p:xfrm>
-          <a:off x="324000" y="2376000"/>
-          <a:ext cx="11545200" cy="3600000"/>
+          <a:off x="324000" y="3299583"/>
+          <a:ext cx="11545200" cy="2676414"/>
         </p:xfrm>
         <a:graphic>
           <a:graphicData uri="http://schemas.openxmlformats.org/drawingml/2006/table">
@@ -7863,7 +7863,7 @@
                 <a:gridCol w="2309040"/>
                 <a:gridCol w="9236160"/>
               </a:tblGrid>
-              <a:tr h="600000">
+              <a:tr h="446069">
                 <a:tc>
                   <a:txBody>
                     <a:bodyPr wrap="square"/>
@@ -7975,7 +7975,7 @@
                   </a:tcPr>
                 </a:tc>
               </a:tr>
-              <a:tr h="600000">
+              <a:tr h="446069">
                 <a:tc>
                   <a:txBody>
                     <a:bodyPr wrap="square"/>
@@ -8087,7 +8087,7 @@
                   </a:tcPr>
                 </a:tc>
               </a:tr>
-              <a:tr h="600000">
+              <a:tr h="446069">
                 <a:tc>
                   <a:txBody>
                     <a:bodyPr wrap="square"/>
@@ -8199,7 +8199,7 @@
                   </a:tcPr>
                 </a:tc>
               </a:tr>
-              <a:tr h="600000">
+              <a:tr h="446069">
                 <a:tc>
                   <a:txBody>
                     <a:bodyPr wrap="square"/>
@@ -8311,7 +8311,7 @@
                   </a:tcPr>
                 </a:tc>
               </a:tr>
-              <a:tr h="600000">
+              <a:tr h="446069">
                 <a:tc>
                   <a:txBody>
                     <a:bodyPr wrap="square"/>
@@ -8423,7 +8423,7 @@
                   </a:tcPr>
                 </a:tc>
               </a:tr>
-              <a:tr h="600000">
+              <a:tr h="446069">
                 <a:tc>
                   <a:txBody>
                     <a:bodyPr wrap="square"/>
@@ -9130,7 +9130,7 @@
           <a:noFill/>
         </p:spPr>
         <p:txBody>
-          <a:bodyPr wrap="square" anchor="t" lIns="43200" rIns="43200" tIns="43200" bIns="43200">
+          <a:bodyPr wrap="square" anchor="ctr" lIns="43200" rIns="43200" tIns="43200" bIns="43200">
             <a:noAutofit/>
           </a:bodyPr>
           <a:lstStyle/>
@@ -9140,7 +9140,7 @@
                 <a:spcPct val="120000"/>
               </a:lnSpc>
               <a:spcBef>
-                <a:spcPts val="1700"/>
+                <a:spcPts val="2070"/>
               </a:spcBef>
               <a:spcAft>
                 <a:spcPts val="0"/>
@@ -9149,7 +9149,7 @@
               <a:buChar char="•"/>
             </a:pPr>
             <a:r>
-              <a:rPr sz="1312" b="0">
+              <a:rPr sz="1500" b="0">
                 <a:solidFill>
                   <a:srgbClr val="1F2A44"/>
                 </a:solidFill>
@@ -9166,7 +9166,7 @@
                 <a:spcPct val="120000"/>
               </a:lnSpc>
               <a:spcBef>
-                <a:spcPts val="1700"/>
+                <a:spcPts val="2070"/>
               </a:spcBef>
               <a:spcAft>
                 <a:spcPts val="0"/>
@@ -9175,7 +9175,7 @@
               <a:buChar char="•"/>
             </a:pPr>
             <a:r>
-              <a:rPr sz="1312" b="0">
+              <a:rPr sz="1500" b="0">
                 <a:solidFill>
                   <a:srgbClr val="1F2A44"/>
                 </a:solidFill>
@@ -9192,7 +9192,7 @@
                 <a:spcPct val="120000"/>
               </a:lnSpc>
               <a:spcBef>
-                <a:spcPts val="1700"/>
+                <a:spcPts val="2070"/>
               </a:spcBef>
               <a:spcAft>
                 <a:spcPts val="0"/>
@@ -9201,7 +9201,7 @@
               <a:buChar char="•"/>
             </a:pPr>
             <a:r>
-              <a:rPr sz="1312" b="0">
+              <a:rPr sz="1500" b="0">
                 <a:solidFill>
                   <a:srgbClr val="1F2A44"/>
                 </a:solidFill>
@@ -9212,7 +9212,7 @@
               <a:t>(환각 차단) 임계 미만 문서 제외, 근거 없으면 </a:t>
             </a:r>
             <a:r>
-              <a:rPr sz="1312" b="1">
+              <a:rPr sz="1500" b="1">
                 <a:solidFill>
                   <a:srgbClr val="1F5FD1"/>
                 </a:solidFill>
@@ -9229,7 +9229,7 @@
                 <a:spcPct val="120000"/>
               </a:lnSpc>
               <a:spcBef>
-                <a:spcPts val="1700"/>
+                <a:spcPts val="2070"/>
               </a:spcBef>
               <a:spcAft>
                 <a:spcPts val="0"/>
@@ -9238,7 +9238,7 @@
               <a:buChar char="•"/>
             </a:pPr>
             <a:r>
-              <a:rPr sz="1312" b="0">
+              <a:rPr sz="1500" b="0">
                 <a:solidFill>
                   <a:srgbClr val="1F2A44"/>
                 </a:solidFill>
@@ -9255,7 +9255,7 @@
                 <a:spcPct val="120000"/>
               </a:lnSpc>
               <a:spcBef>
-                <a:spcPts val="1700"/>
+                <a:spcPts val="2070"/>
               </a:spcBef>
               <a:spcAft>
                 <a:spcPts val="0"/>
@@ -9264,7 +9264,7 @@
               <a:buChar char="•"/>
             </a:pPr>
             <a:r>
-              <a:rPr sz="1312" b="0">
+              <a:rPr sz="1500" b="0">
                 <a:solidFill>
                   <a:srgbClr val="1F2A44"/>
                 </a:solidFill>
@@ -9281,7 +9281,7 @@
                 <a:spcPct val="120000"/>
               </a:lnSpc>
               <a:spcBef>
-                <a:spcPts val="1700"/>
+                <a:spcPts val="2070"/>
               </a:spcBef>
               <a:spcAft>
                 <a:spcPts val="0"/>
@@ -9290,7 +9290,7 @@
               <a:buChar char="•"/>
             </a:pPr>
             <a:r>
-              <a:rPr sz="1312" b="0">
+              <a:rPr sz="1500" b="0">
                 <a:solidFill>
                   <a:srgbClr val="1F2A44"/>
                 </a:solidFill>
@@ -9424,7 +9424,7 @@
         </p:nvGraphicFramePr>
         <p:xfrm>
           <a:off x="6267600" y="1638000"/>
-          <a:ext cx="5511599" cy="1587715"/>
+          <a:ext cx="5511599" cy="2585500"/>
         </p:xfrm>
         <a:graphic>
           <a:graphicData uri="http://schemas.openxmlformats.org/drawingml/2006/table">
@@ -9434,7 +9434,7 @@
                 <a:gridCol w="1677443"/>
                 <a:gridCol w="3834156"/>
               </a:tblGrid>
-              <a:tr h="317543">
+              <a:tr h="517100">
                 <a:tc>
                   <a:txBody>
                     <a:bodyPr wrap="square"/>
@@ -9546,7 +9546,7 @@
                   </a:tcPr>
                 </a:tc>
               </a:tr>
-              <a:tr h="317543">
+              <a:tr h="517100">
                 <a:tc>
                   <a:txBody>
                     <a:bodyPr wrap="square"/>
@@ -9658,7 +9658,7 @@
                   </a:tcPr>
                 </a:tc>
               </a:tr>
-              <a:tr h="317543">
+              <a:tr h="517100">
                 <a:tc>
                   <a:txBody>
                     <a:bodyPr wrap="square"/>
@@ -9770,7 +9770,7 @@
                   </a:tcPr>
                 </a:tc>
               </a:tr>
-              <a:tr h="317543">
+              <a:tr h="517100">
                 <a:tc>
                   <a:txBody>
                     <a:bodyPr wrap="square"/>
@@ -9882,7 +9882,7 @@
                   </a:tcPr>
                 </a:tc>
               </a:tr>
-              <a:tr h="317543">
+              <a:tr h="517100">
                 <a:tc>
                   <a:txBody>
                     <a:bodyPr wrap="square"/>
@@ -10006,8 +10006,8 @@
         </p:nvSpPr>
         <p:spPr>
           <a:xfrm>
-            <a:off x="6267600" y="3333718"/>
-            <a:ext cx="1229400" cy="3074281"/>
+            <a:off x="6267600" y="4331504"/>
+            <a:ext cx="1229400" cy="2076495"/>
           </a:xfrm>
           <a:prstGeom prst="roundRect">
             <a:avLst>
@@ -10054,7 +10054,7 @@
         </p:nvSpPr>
         <p:spPr>
           <a:xfrm>
-            <a:off x="6267600" y="3333718"/>
+            <a:off x="6267600" y="4331504"/>
             <a:ext cx="1229400" cy="306000"/>
           </a:xfrm>
           <a:prstGeom prst="roundRect">
@@ -10121,8 +10121,8 @@
         </p:nvSpPr>
         <p:spPr>
           <a:xfrm>
-            <a:off x="6310800" y="3675718"/>
-            <a:ext cx="1143000" cy="2714281"/>
+            <a:off x="6310800" y="4673504"/>
+            <a:ext cx="1143000" cy="1716495"/>
           </a:xfrm>
           <a:prstGeom prst="rect">
             <a:avLst/>
@@ -10168,7 +10168,7 @@
         </p:nvSpPr>
         <p:spPr>
           <a:xfrm>
-            <a:off x="7525799" y="4762859"/>
+            <a:off x="7525799" y="5261752"/>
             <a:ext cx="140400" cy="216000"/>
           </a:xfrm>
           <a:prstGeom prst="rightArrow">
@@ -10212,8 +10212,8 @@
         </p:nvSpPr>
         <p:spPr>
           <a:xfrm>
-            <a:off x="7695000" y="3333718"/>
-            <a:ext cx="1229400" cy="3074281"/>
+            <a:off x="7695000" y="4331504"/>
+            <a:ext cx="1229400" cy="2076495"/>
           </a:xfrm>
           <a:prstGeom prst="roundRect">
             <a:avLst>
@@ -10260,7 +10260,7 @@
         </p:nvSpPr>
         <p:spPr>
           <a:xfrm>
-            <a:off x="7695000" y="3333718"/>
+            <a:off x="7695000" y="4331504"/>
             <a:ext cx="1229400" cy="306000"/>
           </a:xfrm>
           <a:prstGeom prst="roundRect">
@@ -10327,8 +10327,8 @@
         </p:nvSpPr>
         <p:spPr>
           <a:xfrm>
-            <a:off x="7738200" y="3675718"/>
-            <a:ext cx="1143000" cy="2714281"/>
+            <a:off x="7738200" y="4673504"/>
+            <a:ext cx="1143000" cy="1716495"/>
           </a:xfrm>
           <a:prstGeom prst="rect">
             <a:avLst/>
@@ -10374,7 +10374,7 @@
         </p:nvSpPr>
         <p:spPr>
           <a:xfrm>
-            <a:off x="8953200" y="4762859"/>
+            <a:off x="8953200" y="5261752"/>
             <a:ext cx="140400" cy="216000"/>
           </a:xfrm>
           <a:prstGeom prst="rightArrow">
@@ -10418,8 +10418,8 @@
         </p:nvSpPr>
         <p:spPr>
           <a:xfrm>
-            <a:off x="9122400" y="3333718"/>
-            <a:ext cx="1229400" cy="3074281"/>
+            <a:off x="9122400" y="4331504"/>
+            <a:ext cx="1229400" cy="2076495"/>
           </a:xfrm>
           <a:prstGeom prst="roundRect">
             <a:avLst>
@@ -10466,7 +10466,7 @@
         </p:nvSpPr>
         <p:spPr>
           <a:xfrm>
-            <a:off x="9122400" y="3333718"/>
+            <a:off x="9122400" y="4331504"/>
             <a:ext cx="1229400" cy="306000"/>
           </a:xfrm>
           <a:prstGeom prst="roundRect">
@@ -10533,8 +10533,8 @@
         </p:nvSpPr>
         <p:spPr>
           <a:xfrm>
-            <a:off x="9165600" y="3675718"/>
-            <a:ext cx="1143000" cy="2714281"/>
+            <a:off x="9165600" y="4673504"/>
+            <a:ext cx="1143000" cy="1716495"/>
           </a:xfrm>
           <a:prstGeom prst="rect">
             <a:avLst/>
@@ -10580,7 +10580,7 @@
         </p:nvSpPr>
         <p:spPr>
           <a:xfrm>
-            <a:off x="10380599" y="4762859"/>
+            <a:off x="10380599" y="5261752"/>
             <a:ext cx="140400" cy="216000"/>
           </a:xfrm>
           <a:prstGeom prst="rightArrow">
@@ -10624,8 +10624,8 @@
         </p:nvSpPr>
         <p:spPr>
           <a:xfrm>
-            <a:off x="10549800" y="3333718"/>
-            <a:ext cx="1229400" cy="3074281"/>
+            <a:off x="10549800" y="4331504"/>
+            <a:ext cx="1229400" cy="2076495"/>
           </a:xfrm>
           <a:prstGeom prst="roundRect">
             <a:avLst>
@@ -10672,7 +10672,7 @@
         </p:nvSpPr>
         <p:spPr>
           <a:xfrm>
-            <a:off x="10549800" y="3333718"/>
+            <a:off x="10549800" y="4331504"/>
             <a:ext cx="1229400" cy="306000"/>
           </a:xfrm>
           <a:prstGeom prst="roundRect">
@@ -10739,8 +10739,8 @@
         </p:nvSpPr>
         <p:spPr>
           <a:xfrm>
-            <a:off x="10593000" y="3675718"/>
-            <a:ext cx="1143000" cy="2714281"/>
+            <a:off x="10593000" y="4673504"/>
+            <a:ext cx="1143000" cy="1716495"/>
           </a:xfrm>
           <a:prstGeom prst="rect">
             <a:avLst/>
@@ -13851,7 +13851,7 @@
         <p:spPr>
           <a:xfrm>
             <a:off x="324000" y="1260000"/>
-            <a:ext cx="2150640" cy="637738"/>
+            <a:ext cx="2150640" cy="2610000"/>
           </a:xfrm>
           <a:prstGeom prst="roundRect">
             <a:avLst>
@@ -13944,7 +13944,7 @@
               </a:spcAft>
             </a:pPr>
             <a:r>
-              <a:rPr sz="1264" b="1">
+              <a:rPr sz="1415" b="1">
                 <a:solidFill>
                   <a:srgbClr val="FFFFFF"/>
                 </a:solidFill>
@@ -13966,7 +13966,7 @@
         <p:spPr>
           <a:xfrm>
             <a:off x="367200" y="1602000"/>
-            <a:ext cx="2064240" cy="277738"/>
+            <a:ext cx="2064240" cy="2250000"/>
           </a:xfrm>
           <a:prstGeom prst="rect">
             <a:avLst/>
@@ -13991,7 +13991,7 @@
               </a:spcAft>
             </a:pPr>
             <a:r>
-              <a:rPr sz="1207" b="0">
+              <a:rPr sz="1365" b="0">
                 <a:solidFill>
                   <a:srgbClr val="1F2A44"/>
                 </a:solidFill>
@@ -14012,7 +14012,7 @@
         </p:nvSpPr>
         <p:spPr>
           <a:xfrm>
-            <a:off x="2503440" y="1470869"/>
+            <a:off x="2503440" y="2457000"/>
             <a:ext cx="140400" cy="216000"/>
           </a:xfrm>
           <a:prstGeom prst="rightArrow">
@@ -14057,7 +14057,7 @@
         <p:spPr>
           <a:xfrm>
             <a:off x="2672640" y="1260000"/>
-            <a:ext cx="2150640" cy="637738"/>
+            <a:ext cx="2150640" cy="2610000"/>
           </a:xfrm>
           <a:prstGeom prst="roundRect">
             <a:avLst>
@@ -14150,7 +14150,7 @@
               </a:spcAft>
             </a:pPr>
             <a:r>
-              <a:rPr sz="1264" b="1">
+              <a:rPr sz="1415" b="1">
                 <a:solidFill>
                   <a:srgbClr val="FFFFFF"/>
                 </a:solidFill>
@@ -14172,7 +14172,7 @@
         <p:spPr>
           <a:xfrm>
             <a:off x="2715840" y="1602000"/>
-            <a:ext cx="2064240" cy="277738"/>
+            <a:ext cx="2064240" cy="2250000"/>
           </a:xfrm>
           <a:prstGeom prst="rect">
             <a:avLst/>
@@ -14197,7 +14197,7 @@
               </a:spcAft>
             </a:pPr>
             <a:r>
-              <a:rPr sz="1207" b="0">
+              <a:rPr sz="1365" b="0">
                 <a:solidFill>
                   <a:srgbClr val="1F2A44"/>
                 </a:solidFill>
@@ -14218,7 +14218,7 @@
         </p:nvSpPr>
         <p:spPr>
           <a:xfrm>
-            <a:off x="4852080" y="1470869"/>
+            <a:off x="4852080" y="2457000"/>
             <a:ext cx="140400" cy="216000"/>
           </a:xfrm>
           <a:prstGeom prst="rightArrow">
@@ -14263,7 +14263,7 @@
         <p:spPr>
           <a:xfrm>
             <a:off x="5021280" y="1260000"/>
-            <a:ext cx="2150640" cy="637738"/>
+            <a:ext cx="2150640" cy="2610000"/>
           </a:xfrm>
           <a:prstGeom prst="roundRect">
             <a:avLst>
@@ -14356,7 +14356,7 @@
               </a:spcAft>
             </a:pPr>
             <a:r>
-              <a:rPr sz="1264" b="1">
+              <a:rPr sz="1415" b="1">
                 <a:solidFill>
                   <a:srgbClr val="FFFFFF"/>
                 </a:solidFill>
@@ -14378,7 +14378,7 @@
         <p:spPr>
           <a:xfrm>
             <a:off x="5064480" y="1602000"/>
-            <a:ext cx="2064240" cy="277738"/>
+            <a:ext cx="2064240" cy="2250000"/>
           </a:xfrm>
           <a:prstGeom prst="rect">
             <a:avLst/>
@@ -14403,7 +14403,7 @@
               </a:spcAft>
             </a:pPr>
             <a:r>
-              <a:rPr sz="1207" b="0">
+              <a:rPr sz="1365" b="0">
                 <a:solidFill>
                   <a:srgbClr val="1F2A44"/>
                 </a:solidFill>
@@ -14424,7 +14424,7 @@
         </p:nvSpPr>
         <p:spPr>
           <a:xfrm>
-            <a:off x="7200720" y="1470869"/>
+            <a:off x="7200720" y="2457000"/>
             <a:ext cx="140400" cy="216000"/>
           </a:xfrm>
           <a:prstGeom prst="rightArrow">
@@ -14469,7 +14469,7 @@
         <p:spPr>
           <a:xfrm>
             <a:off x="7369919" y="1260000"/>
-            <a:ext cx="2150640" cy="637738"/>
+            <a:ext cx="2150640" cy="2610000"/>
           </a:xfrm>
           <a:prstGeom prst="roundRect">
             <a:avLst>
@@ -14562,7 +14562,7 @@
               </a:spcAft>
             </a:pPr>
             <a:r>
-              <a:rPr sz="1264" b="1">
+              <a:rPr sz="1415" b="1">
                 <a:solidFill>
                   <a:srgbClr val="FFFFFF"/>
                 </a:solidFill>
@@ -14584,7 +14584,7 @@
         <p:spPr>
           <a:xfrm>
             <a:off x="7413120" y="1602000"/>
-            <a:ext cx="2064240" cy="277738"/>
+            <a:ext cx="2064240" cy="2250000"/>
           </a:xfrm>
           <a:prstGeom prst="rect">
             <a:avLst/>
@@ -14609,7 +14609,7 @@
               </a:spcAft>
             </a:pPr>
             <a:r>
-              <a:rPr sz="1207" b="0">
+              <a:rPr sz="1365" b="0">
                 <a:solidFill>
                   <a:srgbClr val="1F2A44"/>
                 </a:solidFill>
@@ -14630,7 +14630,7 @@
         </p:nvSpPr>
         <p:spPr>
           <a:xfrm>
-            <a:off x="9549359" y="1470869"/>
+            <a:off x="9549359" y="2457000"/>
             <a:ext cx="140400" cy="216000"/>
           </a:xfrm>
           <a:prstGeom prst="rightArrow">
@@ -14675,7 +14675,7 @@
         <p:spPr>
           <a:xfrm>
             <a:off x="9718560" y="1260000"/>
-            <a:ext cx="2150640" cy="637738"/>
+            <a:ext cx="2150640" cy="2610000"/>
           </a:xfrm>
           <a:prstGeom prst="roundRect">
             <a:avLst>
@@ -14768,7 +14768,7 @@
               </a:spcAft>
             </a:pPr>
             <a:r>
-              <a:rPr sz="1264" b="1">
+              <a:rPr sz="1415" b="1">
                 <a:solidFill>
                   <a:srgbClr val="FFFFFF"/>
                 </a:solidFill>
@@ -14790,7 +14790,7 @@
         <p:spPr>
           <a:xfrm>
             <a:off x="9761760" y="1602000"/>
-            <a:ext cx="2064240" cy="277738"/>
+            <a:ext cx="2064240" cy="2250000"/>
           </a:xfrm>
           <a:prstGeom prst="rect">
             <a:avLst/>
@@ -14815,7 +14815,7 @@
               </a:spcAft>
             </a:pPr>
             <a:r>
-              <a:rPr sz="1207" b="0">
+              <a:rPr sz="1365" b="0">
                 <a:solidFill>
                   <a:srgbClr val="1F2A44"/>
                 </a:solidFill>
@@ -14836,8 +14836,8 @@
         </p:nvSpPr>
         <p:spPr>
           <a:xfrm>
-            <a:off x="324000" y="2005738"/>
-            <a:ext cx="2818800" cy="4474261"/>
+            <a:off x="324000" y="3978000"/>
+            <a:ext cx="2818800" cy="2501999"/>
           </a:xfrm>
           <a:prstGeom prst="roundRect">
             <a:avLst>
@@ -14884,7 +14884,7 @@
         </p:nvSpPr>
         <p:spPr>
           <a:xfrm>
-            <a:off x="396000" y="2048938"/>
+            <a:off x="396000" y="4021200"/>
             <a:ext cx="2674800" cy="251999"/>
           </a:xfrm>
           <a:prstGeom prst="rect">
@@ -14899,7 +14899,7 @@
           <a:lstStyle/>
           <a:p>
             <a:r>
-              <a:rPr sz="1450" b="1">
+              <a:rPr sz="1550" b="1">
                 <a:solidFill>
                   <a:srgbClr val="1F5FD1"/>
                 </a:solidFill>
@@ -14920,7 +14920,7 @@
         </p:nvSpPr>
         <p:spPr>
           <a:xfrm>
-            <a:off x="396000" y="2300938"/>
+            <a:off x="396000" y="4273200"/>
             <a:ext cx="2674800" cy="7200"/>
           </a:xfrm>
           <a:prstGeom prst="rect">
@@ -14964,8 +14964,8 @@
         </p:nvSpPr>
         <p:spPr>
           <a:xfrm>
-            <a:off x="378000" y="2329738"/>
-            <a:ext cx="2710800" cy="4114261"/>
+            <a:off x="378000" y="4302000"/>
+            <a:ext cx="2710800" cy="2141999"/>
           </a:xfrm>
           <a:prstGeom prst="rect">
             <a:avLst/>
@@ -14973,7 +14973,7 @@
           <a:noFill/>
         </p:spPr>
         <p:txBody>
-          <a:bodyPr wrap="square" anchor="t" lIns="28800" rIns="28800" tIns="28800" bIns="28800">
+          <a:bodyPr wrap="square" anchor="ctr" lIns="28800" rIns="28800" tIns="28800" bIns="28800">
             <a:noAutofit/>
           </a:bodyPr>
           <a:lstStyle/>
@@ -14986,13 +14986,13 @@
                 <a:spcPts val="0"/>
               </a:spcBef>
               <a:spcAft>
-                <a:spcPts val="1000"/>
+                <a:spcPts val="1800"/>
               </a:spcAft>
               <a:buFont typeface="Segoe UI Symbol"/>
               <a:buChar char="✓"/>
             </a:pPr>
             <a:r>
-              <a:rPr sz="1350" b="0">
+              <a:rPr sz="1450" b="0">
                 <a:solidFill>
                   <a:srgbClr val="1F2A44"/>
                 </a:solidFill>
@@ -15013,8 +15013,8 @@
         </p:nvSpPr>
         <p:spPr>
           <a:xfrm>
-            <a:off x="3232800" y="2005738"/>
-            <a:ext cx="2818800" cy="4474261"/>
+            <a:off x="3232800" y="3978000"/>
+            <a:ext cx="2818800" cy="2501999"/>
           </a:xfrm>
           <a:prstGeom prst="roundRect">
             <a:avLst>
@@ -15061,7 +15061,7 @@
         </p:nvSpPr>
         <p:spPr>
           <a:xfrm>
-            <a:off x="3304800" y="2048938"/>
+            <a:off x="3304800" y="4021200"/>
             <a:ext cx="2674800" cy="251999"/>
           </a:xfrm>
           <a:prstGeom prst="rect">
@@ -15076,7 +15076,7 @@
           <a:lstStyle/>
           <a:p>
             <a:r>
-              <a:rPr sz="1450" b="1">
+              <a:rPr sz="1550" b="1">
                 <a:solidFill>
                   <a:srgbClr val="1F5FD1"/>
                 </a:solidFill>
@@ -15097,7 +15097,7 @@
         </p:nvSpPr>
         <p:spPr>
           <a:xfrm>
-            <a:off x="3304800" y="2300938"/>
+            <a:off x="3304800" y="4273200"/>
             <a:ext cx="2674800" cy="7200"/>
           </a:xfrm>
           <a:prstGeom prst="rect">
@@ -15141,8 +15141,8 @@
         </p:nvSpPr>
         <p:spPr>
           <a:xfrm>
-            <a:off x="3286800" y="2329738"/>
-            <a:ext cx="2710800" cy="4114261"/>
+            <a:off x="3286800" y="4302000"/>
+            <a:ext cx="2710800" cy="2141999"/>
           </a:xfrm>
           <a:prstGeom prst="rect">
             <a:avLst/>
@@ -15150,7 +15150,7 @@
           <a:noFill/>
         </p:spPr>
         <p:txBody>
-          <a:bodyPr wrap="square" anchor="t" lIns="28800" rIns="28800" tIns="28800" bIns="28800">
+          <a:bodyPr wrap="square" anchor="ctr" lIns="28800" rIns="28800" tIns="28800" bIns="28800">
             <a:noAutofit/>
           </a:bodyPr>
           <a:lstStyle/>
@@ -15163,13 +15163,13 @@
                 <a:spcPts val="0"/>
               </a:spcBef>
               <a:spcAft>
-                <a:spcPts val="1000"/>
+                <a:spcPts val="1800"/>
               </a:spcAft>
               <a:buFont typeface="Segoe UI Symbol"/>
               <a:buChar char="✓"/>
             </a:pPr>
             <a:r>
-              <a:rPr sz="1350" b="0">
+              <a:rPr sz="1450" b="0">
                 <a:solidFill>
                   <a:srgbClr val="1F2A44"/>
                 </a:solidFill>
@@ -15189,13 +15189,13 @@
                 <a:spcPts val="0"/>
               </a:spcBef>
               <a:spcAft>
-                <a:spcPts val="1000"/>
+                <a:spcPts val="1800"/>
               </a:spcAft>
               <a:buFont typeface="Segoe UI Symbol"/>
               <a:buChar char="✓"/>
             </a:pPr>
             <a:r>
-              <a:rPr sz="1350" b="0">
+              <a:rPr sz="1450" b="0">
                 <a:solidFill>
                   <a:srgbClr val="1F2A44"/>
                 </a:solidFill>
@@ -15216,8 +15216,8 @@
         </p:nvSpPr>
         <p:spPr>
           <a:xfrm>
-            <a:off x="6141600" y="2005738"/>
-            <a:ext cx="2818800" cy="4474261"/>
+            <a:off x="6141600" y="3978000"/>
+            <a:ext cx="2818800" cy="2501999"/>
           </a:xfrm>
           <a:prstGeom prst="roundRect">
             <a:avLst>
@@ -15264,7 +15264,7 @@
         </p:nvSpPr>
         <p:spPr>
           <a:xfrm>
-            <a:off x="6213599" y="2048938"/>
+            <a:off x="6213599" y="4021200"/>
             <a:ext cx="2674800" cy="251999"/>
           </a:xfrm>
           <a:prstGeom prst="rect">
@@ -15279,7 +15279,7 @@
           <a:lstStyle/>
           <a:p>
             <a:r>
-              <a:rPr sz="1450" b="1">
+              <a:rPr sz="1550" b="1">
                 <a:solidFill>
                   <a:srgbClr val="1F5FD1"/>
                 </a:solidFill>
@@ -15300,7 +15300,7 @@
         </p:nvSpPr>
         <p:spPr>
           <a:xfrm>
-            <a:off x="6213599" y="2300938"/>
+            <a:off x="6213599" y="4273200"/>
             <a:ext cx="2674800" cy="7200"/>
           </a:xfrm>
           <a:prstGeom prst="rect">
@@ -15344,8 +15344,8 @@
         </p:nvSpPr>
         <p:spPr>
           <a:xfrm>
-            <a:off x="6195599" y="2329738"/>
-            <a:ext cx="2710800" cy="4114261"/>
+            <a:off x="6195599" y="4302000"/>
+            <a:ext cx="2710800" cy="2141999"/>
           </a:xfrm>
           <a:prstGeom prst="rect">
             <a:avLst/>
@@ -15353,7 +15353,7 @@
           <a:noFill/>
         </p:spPr>
         <p:txBody>
-          <a:bodyPr wrap="square" anchor="t" lIns="28800" rIns="28800" tIns="28800" bIns="28800">
+          <a:bodyPr wrap="square" anchor="ctr" lIns="28800" rIns="28800" tIns="28800" bIns="28800">
             <a:noAutofit/>
           </a:bodyPr>
           <a:lstStyle/>
@@ -15366,13 +15366,13 @@
                 <a:spcPts val="0"/>
               </a:spcBef>
               <a:spcAft>
-                <a:spcPts val="1000"/>
+                <a:spcPts val="1800"/>
               </a:spcAft>
               <a:buFont typeface="Segoe UI Symbol"/>
               <a:buChar char="✓"/>
             </a:pPr>
             <a:r>
-              <a:rPr sz="1350" b="0">
+              <a:rPr sz="1450" b="0">
                 <a:solidFill>
                   <a:srgbClr val="1F2A44"/>
                 </a:solidFill>
@@ -15392,13 +15392,13 @@
                 <a:spcPts val="0"/>
               </a:spcBef>
               <a:spcAft>
-                <a:spcPts val="1000"/>
+                <a:spcPts val="1800"/>
               </a:spcAft>
               <a:buFont typeface="Segoe UI Symbol"/>
               <a:buChar char="✓"/>
             </a:pPr>
             <a:r>
-              <a:rPr sz="1350" b="0">
+              <a:rPr sz="1450" b="0">
                 <a:solidFill>
                   <a:srgbClr val="1F2A44"/>
                 </a:solidFill>
@@ -15419,8 +15419,8 @@
         </p:nvSpPr>
         <p:spPr>
           <a:xfrm>
-            <a:off x="9050400" y="2005738"/>
-            <a:ext cx="2818800" cy="4474261"/>
+            <a:off x="9050400" y="3978000"/>
+            <a:ext cx="2818800" cy="2501999"/>
           </a:xfrm>
           <a:prstGeom prst="roundRect">
             <a:avLst>
@@ -15467,7 +15467,7 @@
         </p:nvSpPr>
         <p:spPr>
           <a:xfrm>
-            <a:off x="9122400" y="2048938"/>
+            <a:off x="9122400" y="4021200"/>
             <a:ext cx="2674800" cy="251999"/>
           </a:xfrm>
           <a:prstGeom prst="rect">
@@ -15482,7 +15482,7 @@
           <a:lstStyle/>
           <a:p>
             <a:r>
-              <a:rPr sz="1450" b="1">
+              <a:rPr sz="1550" b="1">
                 <a:solidFill>
                   <a:srgbClr val="1F5FD1"/>
                 </a:solidFill>
@@ -15503,7 +15503,7 @@
         </p:nvSpPr>
         <p:spPr>
           <a:xfrm>
-            <a:off x="9122400" y="2300938"/>
+            <a:off x="9122400" y="4273200"/>
             <a:ext cx="2674800" cy="7200"/>
           </a:xfrm>
           <a:prstGeom prst="rect">
@@ -15547,8 +15547,8 @@
         </p:nvSpPr>
         <p:spPr>
           <a:xfrm>
-            <a:off x="9104400" y="2329738"/>
-            <a:ext cx="2710800" cy="4114261"/>
+            <a:off x="9104400" y="4302000"/>
+            <a:ext cx="2710800" cy="2141999"/>
           </a:xfrm>
           <a:prstGeom prst="rect">
             <a:avLst/>
@@ -15556,7 +15556,7 @@
           <a:noFill/>
         </p:spPr>
         <p:txBody>
-          <a:bodyPr wrap="square" anchor="t" lIns="28800" rIns="28800" tIns="28800" bIns="28800">
+          <a:bodyPr wrap="square" anchor="ctr" lIns="28800" rIns="28800" tIns="28800" bIns="28800">
             <a:noAutofit/>
           </a:bodyPr>
           <a:lstStyle/>
@@ -15569,13 +15569,13 @@
                 <a:spcPts val="0"/>
               </a:spcBef>
               <a:spcAft>
-                <a:spcPts val="1000"/>
+                <a:spcPts val="1800"/>
               </a:spcAft>
               <a:buFont typeface="Segoe UI Symbol"/>
               <a:buChar char="✓"/>
             </a:pPr>
             <a:r>
-              <a:rPr sz="1350" b="0">
+              <a:rPr sz="1450" b="0">
                 <a:solidFill>
                   <a:srgbClr val="1F2A44"/>
                 </a:solidFill>
@@ -17564,7 +17564,7 @@
           <a:lstStyle/>
           <a:p>
             <a:r>
-              <a:rPr sz="1450" b="1">
+              <a:rPr sz="1550" b="1">
                 <a:solidFill>
                   <a:srgbClr val="1F5FD1"/>
                 </a:solidFill>
@@ -17638,7 +17638,7 @@
           <a:noFill/>
         </p:spPr>
         <p:txBody>
-          <a:bodyPr wrap="square" anchor="t" lIns="28800" rIns="28800" tIns="28800" bIns="28800">
+          <a:bodyPr wrap="square" anchor="ctr" lIns="28800" rIns="28800" tIns="28800" bIns="28800">
             <a:noAutofit/>
           </a:bodyPr>
           <a:lstStyle/>
@@ -17651,13 +17651,13 @@
                 <a:spcPts val="0"/>
               </a:spcBef>
               <a:spcAft>
-                <a:spcPts val="1000"/>
+                <a:spcPts val="1800"/>
               </a:spcAft>
               <a:buFont typeface="Segoe UI Symbol"/>
               <a:buChar char="✓"/>
             </a:pPr>
             <a:r>
-              <a:rPr sz="1350" b="0">
+              <a:rPr sz="1450" b="0">
                 <a:solidFill>
                   <a:srgbClr val="1F2A44"/>
                 </a:solidFill>
@@ -17741,7 +17741,7 @@
           <a:lstStyle/>
           <a:p>
             <a:r>
-              <a:rPr sz="1450" b="1">
+              <a:rPr sz="1550" b="1">
                 <a:solidFill>
                   <a:srgbClr val="1F5FD1"/>
                 </a:solidFill>
@@ -17815,7 +17815,7 @@
           <a:noFill/>
         </p:spPr>
         <p:txBody>
-          <a:bodyPr wrap="square" anchor="t" lIns="28800" rIns="28800" tIns="28800" bIns="28800">
+          <a:bodyPr wrap="square" anchor="ctr" lIns="28800" rIns="28800" tIns="28800" bIns="28800">
             <a:noAutofit/>
           </a:bodyPr>
           <a:lstStyle/>
@@ -17828,13 +17828,13 @@
                 <a:spcPts val="0"/>
               </a:spcBef>
               <a:spcAft>
-                <a:spcPts val="1000"/>
+                <a:spcPts val="1800"/>
               </a:spcAft>
               <a:buFont typeface="Segoe UI Symbol"/>
               <a:buChar char="✓"/>
             </a:pPr>
             <a:r>
-              <a:rPr sz="1350" b="0">
+              <a:rPr sz="1450" b="0">
                 <a:solidFill>
                   <a:srgbClr val="1F2A44"/>
                 </a:solidFill>
@@ -17918,7 +17918,7 @@
           <a:lstStyle/>
           <a:p>
             <a:r>
-              <a:rPr sz="1450" b="1">
+              <a:rPr sz="1550" b="1">
                 <a:solidFill>
                   <a:srgbClr val="1F5FD1"/>
                 </a:solidFill>
@@ -17992,7 +17992,7 @@
           <a:noFill/>
         </p:spPr>
         <p:txBody>
-          <a:bodyPr wrap="square" anchor="t" lIns="28800" rIns="28800" tIns="28800" bIns="28800">
+          <a:bodyPr wrap="square" anchor="ctr" lIns="28800" rIns="28800" tIns="28800" bIns="28800">
             <a:noAutofit/>
           </a:bodyPr>
           <a:lstStyle/>
@@ -18005,13 +18005,13 @@
                 <a:spcPts val="0"/>
               </a:spcBef>
               <a:spcAft>
-                <a:spcPts val="1000"/>
+                <a:spcPts val="1800"/>
               </a:spcAft>
               <a:buFont typeface="Segoe UI Symbol"/>
               <a:buChar char="✓"/>
             </a:pPr>
             <a:r>
-              <a:rPr sz="1350" b="0">
+              <a:rPr sz="1450" b="0">
                 <a:solidFill>
                   <a:srgbClr val="1F2A44"/>
                 </a:solidFill>
@@ -18824,7 +18824,7 @@
         <p:spPr>
           <a:xfrm>
             <a:off x="324000" y="1260000"/>
-            <a:ext cx="2150640" cy="936000"/>
+            <a:ext cx="2150640" cy="2041652"/>
           </a:xfrm>
           <a:prstGeom prst="roundRect">
             <a:avLst>
@@ -18917,7 +18917,7 @@
               </a:spcAft>
             </a:pPr>
             <a:r>
-              <a:rPr sz="1264" b="1">
+              <a:rPr sz="1415" b="1">
                 <a:solidFill>
                   <a:srgbClr val="FFFFFF"/>
                 </a:solidFill>
@@ -18939,7 +18939,7 @@
         <p:spPr>
           <a:xfrm>
             <a:off x="367200" y="1602000"/>
-            <a:ext cx="2064240" cy="576000"/>
+            <a:ext cx="2064240" cy="1681652"/>
           </a:xfrm>
           <a:prstGeom prst="rect">
             <a:avLst/>
@@ -18964,7 +18964,7 @@
               </a:spcAft>
             </a:pPr>
             <a:r>
-              <a:rPr sz="1207" b="0">
+              <a:rPr sz="1365" b="0">
                 <a:solidFill>
                   <a:srgbClr val="1F2A44"/>
                 </a:solidFill>
@@ -18985,7 +18985,7 @@
         </p:nvSpPr>
         <p:spPr>
           <a:xfrm>
-            <a:off x="2503440" y="1620000"/>
+            <a:off x="2503440" y="2172826"/>
             <a:ext cx="140400" cy="216000"/>
           </a:xfrm>
           <a:prstGeom prst="rightArrow">
@@ -19030,7 +19030,7 @@
         <p:spPr>
           <a:xfrm>
             <a:off x="2672640" y="1260000"/>
-            <a:ext cx="2150640" cy="936000"/>
+            <a:ext cx="2150640" cy="2041652"/>
           </a:xfrm>
           <a:prstGeom prst="roundRect">
             <a:avLst>
@@ -19123,7 +19123,7 @@
               </a:spcAft>
             </a:pPr>
             <a:r>
-              <a:rPr sz="1264" b="1">
+              <a:rPr sz="1415" b="1">
                 <a:solidFill>
                   <a:srgbClr val="FFFFFF"/>
                 </a:solidFill>
@@ -19145,7 +19145,7 @@
         <p:spPr>
           <a:xfrm>
             <a:off x="2715840" y="1602000"/>
-            <a:ext cx="2064240" cy="576000"/>
+            <a:ext cx="2064240" cy="1681652"/>
           </a:xfrm>
           <a:prstGeom prst="rect">
             <a:avLst/>
@@ -19170,7 +19170,7 @@
               </a:spcAft>
             </a:pPr>
             <a:r>
-              <a:rPr sz="1207" b="0">
+              <a:rPr sz="1365" b="0">
                 <a:solidFill>
                   <a:srgbClr val="1F2A44"/>
                 </a:solidFill>
@@ -19191,7 +19191,7 @@
         </p:nvSpPr>
         <p:spPr>
           <a:xfrm>
-            <a:off x="4852080" y="1620000"/>
+            <a:off x="4852080" y="2172826"/>
             <a:ext cx="140400" cy="216000"/>
           </a:xfrm>
           <a:prstGeom prst="rightArrow">
@@ -19236,7 +19236,7 @@
         <p:spPr>
           <a:xfrm>
             <a:off x="5021280" y="1260000"/>
-            <a:ext cx="2150640" cy="936000"/>
+            <a:ext cx="2150640" cy="2041652"/>
           </a:xfrm>
           <a:prstGeom prst="roundRect">
             <a:avLst>
@@ -19329,7 +19329,7 @@
               </a:spcAft>
             </a:pPr>
             <a:r>
-              <a:rPr sz="1264" b="1">
+              <a:rPr sz="1415" b="1">
                 <a:solidFill>
                   <a:srgbClr val="FFFFFF"/>
                 </a:solidFill>
@@ -19351,7 +19351,7 @@
         <p:spPr>
           <a:xfrm>
             <a:off x="5064480" y="1602000"/>
-            <a:ext cx="2064240" cy="576000"/>
+            <a:ext cx="2064240" cy="1681652"/>
           </a:xfrm>
           <a:prstGeom prst="rect">
             <a:avLst/>
@@ -19376,7 +19376,7 @@
               </a:spcAft>
             </a:pPr>
             <a:r>
-              <a:rPr sz="1207" b="0">
+              <a:rPr sz="1365" b="0">
                 <a:solidFill>
                   <a:srgbClr val="1F2A44"/>
                 </a:solidFill>
@@ -19397,7 +19397,7 @@
         </p:nvSpPr>
         <p:spPr>
           <a:xfrm>
-            <a:off x="7200720" y="1620000"/>
+            <a:off x="7200720" y="2172826"/>
             <a:ext cx="140400" cy="216000"/>
           </a:xfrm>
           <a:prstGeom prst="rightArrow">
@@ -19442,7 +19442,7 @@
         <p:spPr>
           <a:xfrm>
             <a:off x="7369919" y="1260000"/>
-            <a:ext cx="2150640" cy="936000"/>
+            <a:ext cx="2150640" cy="2041652"/>
           </a:xfrm>
           <a:prstGeom prst="roundRect">
             <a:avLst>
@@ -19535,7 +19535,7 @@
               </a:spcAft>
             </a:pPr>
             <a:r>
-              <a:rPr sz="1264" b="1">
+              <a:rPr sz="1415" b="1">
                 <a:solidFill>
                   <a:srgbClr val="FFFFFF"/>
                 </a:solidFill>
@@ -19557,7 +19557,7 @@
         <p:spPr>
           <a:xfrm>
             <a:off x="7413120" y="1602000"/>
-            <a:ext cx="2064240" cy="576000"/>
+            <a:ext cx="2064240" cy="1681652"/>
           </a:xfrm>
           <a:prstGeom prst="rect">
             <a:avLst/>
@@ -19582,7 +19582,7 @@
               </a:spcAft>
             </a:pPr>
             <a:r>
-              <a:rPr sz="1207" b="0">
+              <a:rPr sz="1365" b="0">
                 <a:solidFill>
                   <a:srgbClr val="1F2A44"/>
                 </a:solidFill>
@@ -19603,7 +19603,7 @@
         </p:nvSpPr>
         <p:spPr>
           <a:xfrm>
-            <a:off x="9549359" y="1620000"/>
+            <a:off x="9549359" y="2172826"/>
             <a:ext cx="140400" cy="216000"/>
           </a:xfrm>
           <a:prstGeom prst="rightArrow">
@@ -19648,7 +19648,7 @@
         <p:spPr>
           <a:xfrm>
             <a:off x="9718560" y="1260000"/>
-            <a:ext cx="2150640" cy="936000"/>
+            <a:ext cx="2150640" cy="2041652"/>
           </a:xfrm>
           <a:prstGeom prst="roundRect">
             <a:avLst>
@@ -19741,7 +19741,7 @@
               </a:spcAft>
             </a:pPr>
             <a:r>
-              <a:rPr sz="1264" b="1">
+              <a:rPr sz="1415" b="1">
                 <a:solidFill>
                   <a:srgbClr val="FFFFFF"/>
                 </a:solidFill>
@@ -19763,7 +19763,7 @@
         <p:spPr>
           <a:xfrm>
             <a:off x="9761760" y="1602000"/>
-            <a:ext cx="2064240" cy="576000"/>
+            <a:ext cx="2064240" cy="1681652"/>
           </a:xfrm>
           <a:prstGeom prst="rect">
             <a:avLst/>
@@ -19788,7 +19788,7 @@
               </a:spcAft>
             </a:pPr>
             <a:r>
-              <a:rPr sz="1207" b="0">
+              <a:rPr sz="1365" b="0">
                 <a:solidFill>
                   <a:srgbClr val="1F2A44"/>
                 </a:solidFill>
@@ -19810,8 +19810,8 @@
           <p:nvPr/>
         </p:nvGraphicFramePr>
         <p:xfrm>
-          <a:off x="324000" y="2304000"/>
-          <a:ext cx="11545199" cy="3672000"/>
+          <a:off x="324000" y="3409652"/>
+          <a:ext cx="11545199" cy="2566345"/>
         </p:xfrm>
         <a:graphic>
           <a:graphicData uri="http://schemas.openxmlformats.org/drawingml/2006/table">
@@ -19822,7 +19822,7 @@
                 <a:gridCol w="5772600"/>
                 <a:gridCol w="3463559"/>
               </a:tblGrid>
-              <a:tr h="734400">
+              <a:tr h="513269">
                 <a:tc>
                   <a:txBody>
                     <a:bodyPr wrap="square"/>
@@ -19989,7 +19989,7 @@
                   </a:tcPr>
                 </a:tc>
               </a:tr>
-              <a:tr h="734400">
+              <a:tr h="513269">
                 <a:tc>
                   <a:txBody>
                     <a:bodyPr wrap="square"/>
@@ -20156,7 +20156,7 @@
                   </a:tcPr>
                 </a:tc>
               </a:tr>
-              <a:tr h="734400">
+              <a:tr h="513269">
                 <a:tc>
                   <a:txBody>
                     <a:bodyPr wrap="square"/>
@@ -20323,7 +20323,7 @@
                   </a:tcPr>
                 </a:tc>
               </a:tr>
-              <a:tr h="734400">
+              <a:tr h="513269">
                 <a:tc>
                   <a:txBody>
                     <a:bodyPr wrap="square"/>
@@ -20490,7 +20490,7 @@
                   </a:tcPr>
                 </a:tc>
               </a:tr>
-              <a:tr h="734400">
+              <a:tr h="513269">
                 <a:tc>
                   <a:txBody>
                     <a:bodyPr wrap="square"/>
@@ -22363,7 +22363,7 @@
           <a:noFill/>
         </p:spPr>
         <p:txBody>
-          <a:bodyPr wrap="square" anchor="t" lIns="43200" rIns="43200" tIns="43200" bIns="43200">
+          <a:bodyPr wrap="square" anchor="ctr" lIns="43200" rIns="43200" tIns="43200" bIns="43200">
             <a:noAutofit/>
           </a:bodyPr>
           <a:lstStyle/>
@@ -22373,7 +22373,7 @@
                 <a:spcPct val="120000"/>
               </a:lnSpc>
               <a:spcBef>
-                <a:spcPts val="1700"/>
+                <a:spcPts val="2700"/>
               </a:spcBef>
               <a:spcAft>
                 <a:spcPts val="0"/>
@@ -22382,7 +22382,7 @@
               <a:buChar char="•"/>
             </a:pPr>
             <a:r>
-              <a:rPr sz="1312" b="1">
+              <a:rPr sz="1500" b="1">
                 <a:solidFill>
                   <a:srgbClr val="1F5FD1"/>
                 </a:solidFill>
@@ -22393,7 +22393,7 @@
               <a:t>① 관련성 임계</a:t>
             </a:r>
             <a:r>
-              <a:rPr sz="1312" b="0">
+              <a:rPr sz="1500" b="0">
                 <a:solidFill>
                   <a:srgbClr val="1F2A44"/>
                 </a:solidFill>
@@ -22410,7 +22410,7 @@
                 <a:spcPct val="120000"/>
               </a:lnSpc>
               <a:spcBef>
-                <a:spcPts val="1700"/>
+                <a:spcPts val="2700"/>
               </a:spcBef>
               <a:spcAft>
                 <a:spcPts val="0"/>
@@ -22419,7 +22419,7 @@
               <a:buChar char="•"/>
             </a:pPr>
             <a:r>
-              <a:rPr sz="1312" b="1">
+              <a:rPr sz="1500" b="1">
                 <a:solidFill>
                   <a:srgbClr val="1F5FD1"/>
                 </a:solidFill>
@@ -22430,7 +22430,7 @@
               <a:t>② 근거 강제</a:t>
             </a:r>
             <a:r>
-              <a:rPr sz="1312" b="0">
+              <a:rPr sz="1500" b="0">
                 <a:solidFill>
                   <a:srgbClr val="1F2A44"/>
                 </a:solidFill>
@@ -22447,7 +22447,7 @@
                 <a:spcPct val="120000"/>
               </a:lnSpc>
               <a:spcBef>
-                <a:spcPts val="1700"/>
+                <a:spcPts val="2700"/>
               </a:spcBef>
               <a:spcAft>
                 <a:spcPts val="0"/>
@@ -22456,7 +22456,7 @@
               <a:buChar char="•"/>
             </a:pPr>
             <a:r>
-              <a:rPr sz="1312" b="1">
+              <a:rPr sz="1500" b="1">
                 <a:solidFill>
                   <a:srgbClr val="1F5FD1"/>
                 </a:solidFill>
@@ -22467,7 +22467,7 @@
               <a:t>③ 자기 검증</a:t>
             </a:r>
             <a:r>
-              <a:rPr sz="1312" b="0">
+              <a:rPr sz="1500" b="0">
                 <a:solidFill>
                   <a:srgbClr val="1F2A44"/>
                 </a:solidFill>
@@ -32394,7 +32394,7 @@
         <p:spPr>
           <a:xfrm>
             <a:off x="324000" y="1260000"/>
-            <a:ext cx="4148181" cy="468000"/>
+            <a:ext cx="4148181" cy="792000"/>
           </a:xfrm>
           <a:prstGeom prst="rect">
             <a:avLst/>
@@ -32438,7 +32438,7 @@
         <p:spPr>
           <a:xfrm>
             <a:off x="360000" y="1260000"/>
-            <a:ext cx="1152000" cy="468000"/>
+            <a:ext cx="1152000" cy="792000"/>
           </a:xfrm>
           <a:prstGeom prst="rect">
             <a:avLst/>
@@ -32485,7 +32485,7 @@
         <p:spPr>
           <a:xfrm>
             <a:off x="1548000" y="1324800"/>
-            <a:ext cx="668045" cy="338400"/>
+            <a:ext cx="668045" cy="662400"/>
           </a:xfrm>
           <a:prstGeom prst="roundRect">
             <a:avLst>
@@ -32552,7 +32552,7 @@
         <p:spPr>
           <a:xfrm>
             <a:off x="2270045" y="1324800"/>
-            <a:ext cx="668045" cy="338400"/>
+            <a:ext cx="668045" cy="662400"/>
           </a:xfrm>
           <a:prstGeom prst="roundRect">
             <a:avLst>
@@ -32619,7 +32619,7 @@
         <p:spPr>
           <a:xfrm>
             <a:off x="2992090" y="1324800"/>
-            <a:ext cx="668045" cy="338400"/>
+            <a:ext cx="668045" cy="662400"/>
           </a:xfrm>
           <a:prstGeom prst="roundRect">
             <a:avLst>
@@ -32686,7 +32686,7 @@
         <p:spPr>
           <a:xfrm>
             <a:off x="3714136" y="1324800"/>
-            <a:ext cx="668045" cy="338400"/>
+            <a:ext cx="668045" cy="662400"/>
           </a:xfrm>
           <a:prstGeom prst="roundRect">
             <a:avLst>
@@ -32753,7 +32753,7 @@
         <p:spPr>
           <a:xfrm>
             <a:off x="4562181" y="1260000"/>
-            <a:ext cx="936000" cy="468000"/>
+            <a:ext cx="936000" cy="792000"/>
           </a:xfrm>
           <a:prstGeom prst="rect">
             <a:avLst/>
@@ -32819,8 +32819,8 @@
         </p:nvSpPr>
         <p:spPr>
           <a:xfrm>
-            <a:off x="324000" y="1782000"/>
-            <a:ext cx="4148181" cy="468000"/>
+            <a:off x="324000" y="2106000"/>
+            <a:ext cx="4148181" cy="792000"/>
           </a:xfrm>
           <a:prstGeom prst="rect">
             <a:avLst/>
@@ -32863,8 +32863,8 @@
         </p:nvSpPr>
         <p:spPr>
           <a:xfrm>
-            <a:off x="360000" y="1782000"/>
-            <a:ext cx="1152000" cy="468000"/>
+            <a:off x="360000" y="2106000"/>
+            <a:ext cx="1152000" cy="792000"/>
           </a:xfrm>
           <a:prstGeom prst="rect">
             <a:avLst/>
@@ -32910,8 +32910,8 @@
         </p:nvSpPr>
         <p:spPr>
           <a:xfrm>
-            <a:off x="1548000" y="1846800"/>
-            <a:ext cx="908727" cy="338400"/>
+            <a:off x="1548000" y="2170800"/>
+            <a:ext cx="908727" cy="662400"/>
           </a:xfrm>
           <a:prstGeom prst="roundRect">
             <a:avLst>
@@ -32977,8 +32977,8 @@
         </p:nvSpPr>
         <p:spPr>
           <a:xfrm>
-            <a:off x="2510727" y="1846800"/>
-            <a:ext cx="908727" cy="338400"/>
+            <a:off x="2510727" y="2170800"/>
+            <a:ext cx="908727" cy="662400"/>
           </a:xfrm>
           <a:prstGeom prst="roundRect">
             <a:avLst>
@@ -33044,8 +33044,8 @@
         </p:nvSpPr>
         <p:spPr>
           <a:xfrm>
-            <a:off x="3473454" y="1846800"/>
-            <a:ext cx="908727" cy="338400"/>
+            <a:off x="3473454" y="2170800"/>
+            <a:ext cx="908727" cy="662400"/>
           </a:xfrm>
           <a:prstGeom prst="roundRect">
             <a:avLst>
@@ -33111,8 +33111,8 @@
         </p:nvSpPr>
         <p:spPr>
           <a:xfrm>
-            <a:off x="4562181" y="1782000"/>
-            <a:ext cx="936000" cy="468000"/>
+            <a:off x="4562181" y="2106000"/>
+            <a:ext cx="936000" cy="792000"/>
           </a:xfrm>
           <a:prstGeom prst="rect">
             <a:avLst/>
@@ -33178,8 +33178,8 @@
         </p:nvSpPr>
         <p:spPr>
           <a:xfrm>
-            <a:off x="324000" y="2304000"/>
-            <a:ext cx="4148181" cy="468000"/>
+            <a:off x="324000" y="2951999"/>
+            <a:ext cx="4148181" cy="792000"/>
           </a:xfrm>
           <a:prstGeom prst="rect">
             <a:avLst/>
@@ -33222,8 +33222,8 @@
         </p:nvSpPr>
         <p:spPr>
           <a:xfrm>
-            <a:off x="360000" y="2304000"/>
-            <a:ext cx="1152000" cy="468000"/>
+            <a:off x="360000" y="2951999"/>
+            <a:ext cx="1152000" cy="792000"/>
           </a:xfrm>
           <a:prstGeom prst="rect">
             <a:avLst/>
@@ -33269,8 +33269,8 @@
         </p:nvSpPr>
         <p:spPr>
           <a:xfrm>
-            <a:off x="1548000" y="2368800"/>
-            <a:ext cx="523636" cy="338400"/>
+            <a:off x="1548000" y="3016799"/>
+            <a:ext cx="523636" cy="662400"/>
           </a:xfrm>
           <a:prstGeom prst="roundRect">
             <a:avLst>
@@ -33336,8 +33336,8 @@
         </p:nvSpPr>
         <p:spPr>
           <a:xfrm>
-            <a:off x="2125636" y="2368800"/>
-            <a:ext cx="523636" cy="338400"/>
+            <a:off x="2125636" y="3016799"/>
+            <a:ext cx="523636" cy="662400"/>
           </a:xfrm>
           <a:prstGeom prst="roundRect">
             <a:avLst>
@@ -33403,8 +33403,8 @@
         </p:nvSpPr>
         <p:spPr>
           <a:xfrm>
-            <a:off x="2703272" y="2368800"/>
-            <a:ext cx="523636" cy="338400"/>
+            <a:off x="2703272" y="3016799"/>
+            <a:ext cx="523636" cy="662400"/>
           </a:xfrm>
           <a:prstGeom prst="roundRect">
             <a:avLst>
@@ -33470,8 +33470,8 @@
         </p:nvSpPr>
         <p:spPr>
           <a:xfrm>
-            <a:off x="3280909" y="2368800"/>
-            <a:ext cx="523636" cy="338400"/>
+            <a:off x="3280909" y="3016799"/>
+            <a:ext cx="523636" cy="662400"/>
           </a:xfrm>
           <a:prstGeom prst="roundRect">
             <a:avLst>
@@ -33537,8 +33537,8 @@
         </p:nvSpPr>
         <p:spPr>
           <a:xfrm>
-            <a:off x="3858545" y="2368800"/>
-            <a:ext cx="523636" cy="338400"/>
+            <a:off x="3858545" y="3016799"/>
+            <a:ext cx="523636" cy="662400"/>
           </a:xfrm>
           <a:prstGeom prst="roundRect">
             <a:avLst>
@@ -33604,8 +33604,8 @@
         </p:nvSpPr>
         <p:spPr>
           <a:xfrm>
-            <a:off x="4562181" y="2304000"/>
-            <a:ext cx="936000" cy="468000"/>
+            <a:off x="4562181" y="2951999"/>
+            <a:ext cx="936000" cy="792000"/>
           </a:xfrm>
           <a:prstGeom prst="rect">
             <a:avLst/>
@@ -33671,7 +33671,7 @@
         </p:nvSpPr>
         <p:spPr>
           <a:xfrm>
-            <a:off x="324000" y="2880000"/>
+            <a:off x="324000" y="3851999"/>
             <a:ext cx="1652727" cy="1080000"/>
           </a:xfrm>
           <a:prstGeom prst="rect">
@@ -33717,7 +33717,7 @@
         </p:nvSpPr>
         <p:spPr>
           <a:xfrm>
-            <a:off x="324000" y="2934000"/>
+            <a:off x="324000" y="3906000"/>
             <a:ext cx="1652727" cy="468000"/>
           </a:xfrm>
           <a:prstGeom prst="rect">
@@ -33764,7 +33764,7 @@
         </p:nvSpPr>
         <p:spPr>
           <a:xfrm>
-            <a:off x="324000" y="3401999"/>
+            <a:off x="324000" y="4373999"/>
             <a:ext cx="1652727" cy="540000"/>
           </a:xfrm>
           <a:prstGeom prst="rect">
@@ -33811,7 +33811,7 @@
         </p:nvSpPr>
         <p:spPr>
           <a:xfrm>
-            <a:off x="2084727" y="2880000"/>
+            <a:off x="2084727" y="3851999"/>
             <a:ext cx="1652727" cy="1080000"/>
           </a:xfrm>
           <a:prstGeom prst="rect">
@@ -33857,7 +33857,7 @@
         </p:nvSpPr>
         <p:spPr>
           <a:xfrm>
-            <a:off x="2084727" y="2934000"/>
+            <a:off x="2084727" y="3906000"/>
             <a:ext cx="1652727" cy="468000"/>
           </a:xfrm>
           <a:prstGeom prst="rect">
@@ -33904,7 +33904,7 @@
         </p:nvSpPr>
         <p:spPr>
           <a:xfrm>
-            <a:off x="2084727" y="3401999"/>
+            <a:off x="2084727" y="4373999"/>
             <a:ext cx="1652727" cy="540000"/>
           </a:xfrm>
           <a:prstGeom prst="rect">
@@ -33951,7 +33951,7 @@
         </p:nvSpPr>
         <p:spPr>
           <a:xfrm>
-            <a:off x="3845454" y="2880000"/>
+            <a:off x="3845454" y="3851999"/>
             <a:ext cx="1652727" cy="1080000"/>
           </a:xfrm>
           <a:prstGeom prst="rect">
@@ -33997,7 +33997,7 @@
         </p:nvSpPr>
         <p:spPr>
           <a:xfrm>
-            <a:off x="3845454" y="2934000"/>
+            <a:off x="3845454" y="3906000"/>
             <a:ext cx="1652727" cy="468000"/>
           </a:xfrm>
           <a:prstGeom prst="rect">
@@ -34044,7 +34044,7 @@
         </p:nvSpPr>
         <p:spPr>
           <a:xfrm>
-            <a:off x="3845454" y="3401999"/>
+            <a:off x="3845454" y="4373999"/>
             <a:ext cx="1652727" cy="540000"/>
           </a:xfrm>
           <a:prstGeom prst="rect">
@@ -36706,7 +36706,7 @@
           <a:noFill/>
         </p:spPr>
         <p:txBody>
-          <a:bodyPr wrap="square" anchor="t" lIns="43200" rIns="43200" tIns="43200" bIns="43200">
+          <a:bodyPr wrap="square" anchor="ctr" lIns="43200" rIns="43200" tIns="43200" bIns="43200">
             <a:noAutofit/>
           </a:bodyPr>
           <a:lstStyle/>
@@ -36716,7 +36716,7 @@
                 <a:spcPct val="120000"/>
               </a:lnSpc>
               <a:spcBef>
-                <a:spcPts val="1700"/>
+                <a:spcPts val="2700"/>
               </a:spcBef>
               <a:spcAft>
                 <a:spcPts val="0"/>
@@ -36725,7 +36725,7 @@
               <a:buChar char="•"/>
             </a:pPr>
             <a:r>
-              <a:rPr sz="1312" b="0">
+              <a:rPr sz="1500" b="0">
                 <a:solidFill>
                   <a:srgbClr val="1F2A44"/>
                 </a:solidFill>
@@ -36742,7 +36742,7 @@
                 <a:spcPct val="120000"/>
               </a:lnSpc>
               <a:spcBef>
-                <a:spcPts val="1700"/>
+                <a:spcPts val="2700"/>
               </a:spcBef>
               <a:spcAft>
                 <a:spcPts val="0"/>
@@ -36751,7 +36751,7 @@
               <a:buChar char="•"/>
             </a:pPr>
             <a:r>
-              <a:rPr sz="1312" b="0">
+              <a:rPr sz="1500" b="0">
                 <a:solidFill>
                   <a:srgbClr val="1F2A44"/>
                 </a:solidFill>
@@ -36768,7 +36768,7 @@
                 <a:spcPct val="120000"/>
               </a:lnSpc>
               <a:spcBef>
-                <a:spcPts val="1700"/>
+                <a:spcPts val="2700"/>
               </a:spcBef>
               <a:spcAft>
                 <a:spcPts val="0"/>
@@ -36777,7 +36777,7 @@
               <a:buChar char="•"/>
             </a:pPr>
             <a:r>
-              <a:rPr sz="1312" b="0">
+              <a:rPr sz="1500" b="0">
                 <a:solidFill>
                   <a:srgbClr val="1F2A44"/>
                 </a:solidFill>
@@ -36794,7 +36794,7 @@
                 <a:spcPct val="120000"/>
               </a:lnSpc>
               <a:spcBef>
-                <a:spcPts val="1700"/>
+                <a:spcPts val="2700"/>
               </a:spcBef>
               <a:spcAft>
                 <a:spcPts val="0"/>
@@ -36803,7 +36803,7 @@
               <a:buChar char="•"/>
             </a:pPr>
             <a:r>
-              <a:rPr sz="1312" b="0">
+              <a:rPr sz="1500" b="0">
                 <a:solidFill>
                   <a:srgbClr val="1F2A44"/>
                 </a:solidFill>
@@ -36814,7 +36814,7 @@
               <a:t>(운영) 배포 Script, 운영·장애 매뉴얼, </a:t>
             </a:r>
             <a:r>
-              <a:rPr sz="1312" b="1">
+              <a:rPr sz="1500" b="1">
                 <a:solidFill>
                   <a:srgbClr val="1F5FD1"/>
                 </a:solidFill>
@@ -37383,7 +37383,7 @@
         <p:spPr>
           <a:xfrm>
             <a:off x="324000" y="1260000"/>
-            <a:ext cx="2818800" cy="1512000"/>
+            <a:ext cx="2818800" cy="2628000"/>
           </a:xfrm>
           <a:prstGeom prst="roundRect">
             <a:avLst>
@@ -37445,7 +37445,7 @@
           <a:lstStyle/>
           <a:p>
             <a:r>
-              <a:rPr sz="1450" b="1">
+              <a:rPr sz="1550" b="1">
                 <a:solidFill>
                   <a:srgbClr val="1F5FD1"/>
                 </a:solidFill>
@@ -37511,7 +37511,7 @@
         <p:spPr>
           <a:xfrm>
             <a:off x="378000" y="1584000"/>
-            <a:ext cx="2710800" cy="1152000"/>
+            <a:ext cx="2710800" cy="2268000"/>
           </a:xfrm>
           <a:prstGeom prst="rect">
             <a:avLst/>
@@ -37519,7 +37519,7 @@
           <a:noFill/>
         </p:spPr>
         <p:txBody>
-          <a:bodyPr wrap="square" anchor="t" lIns="28800" rIns="28800" tIns="28800" bIns="28800">
+          <a:bodyPr wrap="square" anchor="ctr" lIns="28800" rIns="28800" tIns="28800" bIns="28800">
             <a:noAutofit/>
           </a:bodyPr>
           <a:lstStyle/>
@@ -37532,13 +37532,13 @@
                 <a:spcPts val="0"/>
               </a:spcBef>
               <a:spcAft>
-                <a:spcPts val="991"/>
+                <a:spcPts val="1800"/>
               </a:spcAft>
               <a:buFont typeface="Segoe UI Symbol"/>
               <a:buChar char="✓"/>
             </a:pPr>
             <a:r>
-              <a:rPr sz="1350" b="0">
+              <a:rPr sz="1450" b="0">
                 <a:solidFill>
                   <a:srgbClr val="1F2A44"/>
                 </a:solidFill>
@@ -37549,7 +37549,7 @@
               <a:t>오픈 후 </a:t>
             </a:r>
             <a:r>
-              <a:rPr sz="1350" b="1">
+              <a:rPr sz="1450" b="1">
                 <a:solidFill>
                   <a:srgbClr val="E00000"/>
                 </a:solidFill>
@@ -37560,7 +37560,7 @@
               <a:t>【 】</a:t>
             </a:r>
             <a:r>
-              <a:rPr sz="1350" b="0">
+              <a:rPr sz="1450" b="0">
                 <a:solidFill>
                   <a:srgbClr val="1F2A44"/>
                 </a:solidFill>
@@ -37580,13 +37580,13 @@
                 <a:spcPts val="0"/>
               </a:spcBef>
               <a:spcAft>
-                <a:spcPts val="991"/>
+                <a:spcPts val="1800"/>
               </a:spcAft>
               <a:buFont typeface="Segoe UI Symbol"/>
               <a:buChar char="✓"/>
             </a:pPr>
             <a:r>
-              <a:rPr sz="1350" b="0">
+              <a:rPr sz="1450" b="0">
                 <a:solidFill>
                   <a:srgbClr val="1F2A44"/>
                 </a:solidFill>
@@ -37608,7 +37608,7 @@
         <p:spPr>
           <a:xfrm>
             <a:off x="3232800" y="1260000"/>
-            <a:ext cx="2818800" cy="1512000"/>
+            <a:ext cx="2818800" cy="2628000"/>
           </a:xfrm>
           <a:prstGeom prst="roundRect">
             <a:avLst>
@@ -37670,7 +37670,7 @@
           <a:lstStyle/>
           <a:p>
             <a:r>
-              <a:rPr sz="1450" b="1">
+              <a:rPr sz="1550" b="1">
                 <a:solidFill>
                   <a:srgbClr val="1F5FD1"/>
                 </a:solidFill>
@@ -37736,7 +37736,7 @@
         <p:spPr>
           <a:xfrm>
             <a:off x="3286800" y="1584000"/>
-            <a:ext cx="2710800" cy="1152000"/>
+            <a:ext cx="2710800" cy="2268000"/>
           </a:xfrm>
           <a:prstGeom prst="rect">
             <a:avLst/>
@@ -37744,7 +37744,7 @@
           <a:noFill/>
         </p:spPr>
         <p:txBody>
-          <a:bodyPr wrap="square" anchor="t" lIns="28800" rIns="28800" tIns="28800" bIns="28800">
+          <a:bodyPr wrap="square" anchor="ctr" lIns="28800" rIns="28800" tIns="28800" bIns="28800">
             <a:noAutofit/>
           </a:bodyPr>
           <a:lstStyle/>
@@ -37757,13 +37757,13 @@
                 <a:spcPts val="0"/>
               </a:spcBef>
               <a:spcAft>
-                <a:spcPts val="991"/>
+                <a:spcPts val="1800"/>
               </a:spcAft>
               <a:buFont typeface="Segoe UI Symbol"/>
               <a:buChar char="✓"/>
             </a:pPr>
             <a:r>
-              <a:rPr sz="1350" b="0">
+              <a:rPr sz="1450" b="0">
                 <a:solidFill>
                   <a:srgbClr val="1F2A44"/>
                 </a:solidFill>
@@ -37783,13 +37783,13 @@
                 <a:spcPts val="0"/>
               </a:spcBef>
               <a:spcAft>
-                <a:spcPts val="991"/>
+                <a:spcPts val="1800"/>
               </a:spcAft>
               <a:buFont typeface="Segoe UI Symbol"/>
               <a:buChar char="✓"/>
             </a:pPr>
             <a:r>
-              <a:rPr sz="1350" b="0">
+              <a:rPr sz="1450" b="0">
                 <a:solidFill>
                   <a:srgbClr val="1F2A44"/>
                 </a:solidFill>
@@ -37811,7 +37811,7 @@
         <p:spPr>
           <a:xfrm>
             <a:off x="6141600" y="1260000"/>
-            <a:ext cx="2818800" cy="1512000"/>
+            <a:ext cx="2818800" cy="2628000"/>
           </a:xfrm>
           <a:prstGeom prst="roundRect">
             <a:avLst>
@@ -37873,7 +37873,7 @@
           <a:lstStyle/>
           <a:p>
             <a:r>
-              <a:rPr sz="1450" b="1">
+              <a:rPr sz="1550" b="1">
                 <a:solidFill>
                   <a:srgbClr val="1F5FD1"/>
                 </a:solidFill>
@@ -37939,7 +37939,7 @@
         <p:spPr>
           <a:xfrm>
             <a:off x="6195599" y="1584000"/>
-            <a:ext cx="2710800" cy="1152000"/>
+            <a:ext cx="2710800" cy="2268000"/>
           </a:xfrm>
           <a:prstGeom prst="rect">
             <a:avLst/>
@@ -37947,7 +37947,7 @@
           <a:noFill/>
         </p:spPr>
         <p:txBody>
-          <a:bodyPr wrap="square" anchor="t" lIns="28800" rIns="28800" tIns="28800" bIns="28800">
+          <a:bodyPr wrap="square" anchor="ctr" lIns="28800" rIns="28800" tIns="28800" bIns="28800">
             <a:noAutofit/>
           </a:bodyPr>
           <a:lstStyle/>
@@ -37960,13 +37960,13 @@
                 <a:spcPts val="0"/>
               </a:spcBef>
               <a:spcAft>
-                <a:spcPts val="991"/>
+                <a:spcPts val="1800"/>
               </a:spcAft>
               <a:buFont typeface="Segoe UI Symbol"/>
               <a:buChar char="✓"/>
             </a:pPr>
             <a:r>
-              <a:rPr sz="1350" b="0">
+              <a:rPr sz="1450" b="0">
                 <a:solidFill>
                   <a:srgbClr val="1F2A44"/>
                 </a:solidFill>
@@ -37986,13 +37986,13 @@
                 <a:spcPts val="0"/>
               </a:spcBef>
               <a:spcAft>
-                <a:spcPts val="991"/>
+                <a:spcPts val="1800"/>
               </a:spcAft>
               <a:buFont typeface="Segoe UI Symbol"/>
               <a:buChar char="✓"/>
             </a:pPr>
             <a:r>
-              <a:rPr sz="1350" b="0">
+              <a:rPr sz="1450" b="0">
                 <a:solidFill>
                   <a:srgbClr val="1F2A44"/>
                 </a:solidFill>
@@ -38014,7 +38014,7 @@
         <p:spPr>
           <a:xfrm>
             <a:off x="9050400" y="1260000"/>
-            <a:ext cx="2818800" cy="1512000"/>
+            <a:ext cx="2818800" cy="2628000"/>
           </a:xfrm>
           <a:prstGeom prst="roundRect">
             <a:avLst>
@@ -38076,7 +38076,7 @@
           <a:lstStyle/>
           <a:p>
             <a:r>
-              <a:rPr sz="1450" b="1">
+              <a:rPr sz="1550" b="1">
                 <a:solidFill>
                   <a:srgbClr val="1F5FD1"/>
                 </a:solidFill>
@@ -38142,7 +38142,7 @@
         <p:spPr>
           <a:xfrm>
             <a:off x="9104400" y="1584000"/>
-            <a:ext cx="2710800" cy="1152000"/>
+            <a:ext cx="2710800" cy="2268000"/>
           </a:xfrm>
           <a:prstGeom prst="rect">
             <a:avLst/>
@@ -38150,7 +38150,7 @@
           <a:noFill/>
         </p:spPr>
         <p:txBody>
-          <a:bodyPr wrap="square" anchor="t" lIns="28800" rIns="28800" tIns="28800" bIns="28800">
+          <a:bodyPr wrap="square" anchor="ctr" lIns="28800" rIns="28800" tIns="28800" bIns="28800">
             <a:noAutofit/>
           </a:bodyPr>
           <a:lstStyle/>
@@ -38163,13 +38163,13 @@
                 <a:spcPts val="0"/>
               </a:spcBef>
               <a:spcAft>
-                <a:spcPts val="991"/>
+                <a:spcPts val="1800"/>
               </a:spcAft>
               <a:buFont typeface="Segoe UI Symbol"/>
               <a:buChar char="✓"/>
             </a:pPr>
             <a:r>
-              <a:rPr sz="1350" b="0">
+              <a:rPr sz="1450" b="0">
                 <a:solidFill>
                   <a:srgbClr val="1F2A44"/>
                 </a:solidFill>
@@ -38189,13 +38189,13 @@
                 <a:spcPts val="0"/>
               </a:spcBef>
               <a:spcAft>
-                <a:spcPts val="991"/>
+                <a:spcPts val="1800"/>
               </a:spcAft>
               <a:buFont typeface="Segoe UI Symbol"/>
               <a:buChar char="✓"/>
             </a:pPr>
             <a:r>
-              <a:rPr sz="1350" b="0">
+              <a:rPr sz="1450" b="0">
                 <a:solidFill>
                   <a:srgbClr val="1F2A44"/>
                 </a:solidFill>
@@ -38206,7 +38206,7 @@
               <a:t>요율 확약서 </a:t>
             </a:r>
             <a:r>
-              <a:rPr sz="1350" b="1">
+              <a:rPr sz="1450" b="1">
                 <a:solidFill>
                   <a:srgbClr val="E00000"/>
                 </a:solidFill>
@@ -38227,8 +38227,8 @@
         </p:nvSpPr>
         <p:spPr>
           <a:xfrm>
-            <a:off x="324000" y="2880000"/>
-            <a:ext cx="2737800" cy="3096000"/>
+            <a:off x="324000" y="3996000"/>
+            <a:ext cx="2737800" cy="1980000"/>
           </a:xfrm>
           <a:prstGeom prst="roundRect">
             <a:avLst>
@@ -38275,7 +38275,7 @@
         </p:nvSpPr>
         <p:spPr>
           <a:xfrm>
-            <a:off x="324000" y="2880000"/>
+            <a:off x="324000" y="3996000"/>
             <a:ext cx="2737800" cy="306000"/>
           </a:xfrm>
           <a:prstGeom prst="roundRect">
@@ -38342,8 +38342,8 @@
         </p:nvSpPr>
         <p:spPr>
           <a:xfrm>
-            <a:off x="367200" y="3221999"/>
-            <a:ext cx="2651400" cy="2736000"/>
+            <a:off x="367200" y="4338000"/>
+            <a:ext cx="2651400" cy="1620000"/>
           </a:xfrm>
           <a:prstGeom prst="rect">
             <a:avLst/>
@@ -38389,7 +38389,7 @@
         </p:nvSpPr>
         <p:spPr>
           <a:xfrm>
-            <a:off x="3090600" y="4320000"/>
+            <a:off x="3090600" y="4878000"/>
             <a:ext cx="140400" cy="216000"/>
           </a:xfrm>
           <a:prstGeom prst="rightArrow">
@@ -38433,8 +38433,8 @@
         </p:nvSpPr>
         <p:spPr>
           <a:xfrm>
-            <a:off x="3259800" y="2880000"/>
-            <a:ext cx="2737800" cy="3096000"/>
+            <a:off x="3259800" y="3996000"/>
+            <a:ext cx="2737800" cy="1980000"/>
           </a:xfrm>
           <a:prstGeom prst="roundRect">
             <a:avLst>
@@ -38481,7 +38481,7 @@
         </p:nvSpPr>
         <p:spPr>
           <a:xfrm>
-            <a:off x="3259800" y="2880000"/>
+            <a:off x="3259800" y="3996000"/>
             <a:ext cx="2737800" cy="306000"/>
           </a:xfrm>
           <a:prstGeom prst="roundRect">
@@ -38548,8 +38548,8 @@
         </p:nvSpPr>
         <p:spPr>
           <a:xfrm>
-            <a:off x="3303000" y="3221999"/>
-            <a:ext cx="2651400" cy="2736000"/>
+            <a:off x="3303000" y="4338000"/>
+            <a:ext cx="2651400" cy="1620000"/>
           </a:xfrm>
           <a:prstGeom prst="rect">
             <a:avLst/>
@@ -38595,7 +38595,7 @@
         </p:nvSpPr>
         <p:spPr>
           <a:xfrm>
-            <a:off x="6026400" y="4320000"/>
+            <a:off x="6026400" y="4878000"/>
             <a:ext cx="140400" cy="216000"/>
           </a:xfrm>
           <a:prstGeom prst="rightArrow">
@@ -38639,8 +38639,8 @@
         </p:nvSpPr>
         <p:spPr>
           <a:xfrm>
-            <a:off x="6195600" y="2880000"/>
-            <a:ext cx="2737800" cy="3096000"/>
+            <a:off x="6195600" y="3996000"/>
+            <a:ext cx="2737800" cy="1980000"/>
           </a:xfrm>
           <a:prstGeom prst="roundRect">
             <a:avLst>
@@ -38687,7 +38687,7 @@
         </p:nvSpPr>
         <p:spPr>
           <a:xfrm>
-            <a:off x="6195600" y="2880000"/>
+            <a:off x="6195600" y="3996000"/>
             <a:ext cx="2737800" cy="306000"/>
           </a:xfrm>
           <a:prstGeom prst="roundRect">
@@ -38754,8 +38754,8 @@
         </p:nvSpPr>
         <p:spPr>
           <a:xfrm>
-            <a:off x="6238800" y="3221999"/>
-            <a:ext cx="2651400" cy="2736000"/>
+            <a:off x="6238800" y="4338000"/>
+            <a:ext cx="2651400" cy="1620000"/>
           </a:xfrm>
           <a:prstGeom prst="rect">
             <a:avLst/>
@@ -38801,7 +38801,7 @@
         </p:nvSpPr>
         <p:spPr>
           <a:xfrm>
-            <a:off x="8962200" y="4320000"/>
+            <a:off x="8962200" y="4878000"/>
             <a:ext cx="140400" cy="216000"/>
           </a:xfrm>
           <a:prstGeom prst="rightArrow">
@@ -38845,8 +38845,8 @@
         </p:nvSpPr>
         <p:spPr>
           <a:xfrm>
-            <a:off x="9131400" y="2880000"/>
-            <a:ext cx="2737800" cy="3096000"/>
+            <a:off x="9131400" y="3996000"/>
+            <a:ext cx="2737800" cy="1980000"/>
           </a:xfrm>
           <a:prstGeom prst="roundRect">
             <a:avLst>
@@ -38893,7 +38893,7 @@
         </p:nvSpPr>
         <p:spPr>
           <a:xfrm>
-            <a:off x="9131400" y="2880000"/>
+            <a:off x="9131400" y="3996000"/>
             <a:ext cx="2737800" cy="306000"/>
           </a:xfrm>
           <a:prstGeom prst="roundRect">
@@ -38960,8 +38960,8 @@
         </p:nvSpPr>
         <p:spPr>
           <a:xfrm>
-            <a:off x="9174600" y="3221999"/>
-            <a:ext cx="2651400" cy="2736000"/>
+            <a:off x="9174600" y="4338000"/>
+            <a:ext cx="2651400" cy="1620000"/>
           </a:xfrm>
           <a:prstGeom prst="rect">
             <a:avLst/>
@@ -39533,7 +39533,7 @@
         <p:spPr>
           <a:xfrm>
             <a:off x="324000" y="1260000"/>
-            <a:ext cx="2818800" cy="1440000"/>
+            <a:ext cx="2818800" cy="2439722"/>
           </a:xfrm>
           <a:prstGeom prst="roundRect">
             <a:avLst>
@@ -39595,7 +39595,7 @@
           <a:lstStyle/>
           <a:p>
             <a:r>
-              <a:rPr sz="1404" b="1">
+              <a:rPr sz="1550" b="1">
                 <a:solidFill>
                   <a:srgbClr val="1F5FD1"/>
                 </a:solidFill>
@@ -39661,7 +39661,7 @@
         <p:spPr>
           <a:xfrm>
             <a:off x="378000" y="1584000"/>
-            <a:ext cx="2710800" cy="1080000"/>
+            <a:ext cx="2710800" cy="2079722"/>
           </a:xfrm>
           <a:prstGeom prst="rect">
             <a:avLst/>
@@ -39669,7 +39669,7 @@
           <a:noFill/>
         </p:spPr>
         <p:txBody>
-          <a:bodyPr wrap="square" anchor="t" lIns="28800" rIns="28800" tIns="28800" bIns="28800">
+          <a:bodyPr wrap="square" anchor="ctr" lIns="28800" rIns="28800" tIns="28800" bIns="28800">
             <a:noAutofit/>
           </a:bodyPr>
           <a:lstStyle/>
@@ -39682,13 +39682,13 @@
                 <a:spcPts val="0"/>
               </a:spcBef>
               <a:spcAft>
-                <a:spcPts val="334"/>
+                <a:spcPts val="1800"/>
               </a:spcAft>
               <a:buFont typeface="Segoe UI Symbol"/>
               <a:buChar char="✓"/>
             </a:pPr>
             <a:r>
-              <a:rPr sz="1304" b="0">
+              <a:rPr sz="1450" b="0">
                 <a:solidFill>
                   <a:srgbClr val="1F2A44"/>
                 </a:solidFill>
@@ -39708,13 +39708,13 @@
                 <a:spcPts val="0"/>
               </a:spcBef>
               <a:spcAft>
-                <a:spcPts val="334"/>
+                <a:spcPts val="1800"/>
               </a:spcAft>
               <a:buFont typeface="Segoe UI Symbol"/>
               <a:buChar char="✓"/>
             </a:pPr>
             <a:r>
-              <a:rPr sz="1304" b="0">
+              <a:rPr sz="1450" b="0">
                 <a:solidFill>
                   <a:srgbClr val="1F2A44"/>
                 </a:solidFill>
@@ -39736,7 +39736,7 @@
         <p:spPr>
           <a:xfrm>
             <a:off x="3232800" y="1260000"/>
-            <a:ext cx="2818800" cy="1440000"/>
+            <a:ext cx="2818800" cy="2439722"/>
           </a:xfrm>
           <a:prstGeom prst="roundRect">
             <a:avLst>
@@ -39798,7 +39798,7 @@
           <a:lstStyle/>
           <a:p>
             <a:r>
-              <a:rPr sz="1404" b="1">
+              <a:rPr sz="1550" b="1">
                 <a:solidFill>
                   <a:srgbClr val="1F5FD1"/>
                 </a:solidFill>
@@ -39864,7 +39864,7 @@
         <p:spPr>
           <a:xfrm>
             <a:off x="3286800" y="1584000"/>
-            <a:ext cx="2710800" cy="1080000"/>
+            <a:ext cx="2710800" cy="2079722"/>
           </a:xfrm>
           <a:prstGeom prst="rect">
             <a:avLst/>
@@ -39872,7 +39872,7 @@
           <a:noFill/>
         </p:spPr>
         <p:txBody>
-          <a:bodyPr wrap="square" anchor="t" lIns="28800" rIns="28800" tIns="28800" bIns="28800">
+          <a:bodyPr wrap="square" anchor="ctr" lIns="28800" rIns="28800" tIns="28800" bIns="28800">
             <a:noAutofit/>
           </a:bodyPr>
           <a:lstStyle/>
@@ -39885,13 +39885,13 @@
                 <a:spcPts val="0"/>
               </a:spcBef>
               <a:spcAft>
-                <a:spcPts val="334"/>
+                <a:spcPts val="1800"/>
               </a:spcAft>
               <a:buFont typeface="Segoe UI Symbol"/>
               <a:buChar char="✓"/>
             </a:pPr>
             <a:r>
-              <a:rPr sz="1304" b="0">
+              <a:rPr sz="1450" b="0">
                 <a:solidFill>
                   <a:srgbClr val="1F2A44"/>
                 </a:solidFill>
@@ -39911,13 +39911,13 @@
                 <a:spcPts val="0"/>
               </a:spcBef>
               <a:spcAft>
-                <a:spcPts val="334"/>
+                <a:spcPts val="1800"/>
               </a:spcAft>
               <a:buFont typeface="Segoe UI Symbol"/>
               <a:buChar char="✓"/>
             </a:pPr>
             <a:r>
-              <a:rPr sz="1304" b="0">
+              <a:rPr sz="1450" b="0">
                 <a:solidFill>
                   <a:srgbClr val="1F2A44"/>
                 </a:solidFill>
@@ -39939,7 +39939,7 @@
         <p:spPr>
           <a:xfrm>
             <a:off x="6141600" y="1260000"/>
-            <a:ext cx="2818800" cy="1440000"/>
+            <a:ext cx="2818800" cy="2439722"/>
           </a:xfrm>
           <a:prstGeom prst="roundRect">
             <a:avLst>
@@ -40001,7 +40001,7 @@
           <a:lstStyle/>
           <a:p>
             <a:r>
-              <a:rPr sz="1404" b="1">
+              <a:rPr sz="1550" b="1">
                 <a:solidFill>
                   <a:srgbClr val="1F5FD1"/>
                 </a:solidFill>
@@ -40067,7 +40067,7 @@
         <p:spPr>
           <a:xfrm>
             <a:off x="6195599" y="1584000"/>
-            <a:ext cx="2710800" cy="1080000"/>
+            <a:ext cx="2710800" cy="2079722"/>
           </a:xfrm>
           <a:prstGeom prst="rect">
             <a:avLst/>
@@ -40075,7 +40075,7 @@
           <a:noFill/>
         </p:spPr>
         <p:txBody>
-          <a:bodyPr wrap="square" anchor="t" lIns="28800" rIns="28800" tIns="28800" bIns="28800">
+          <a:bodyPr wrap="square" anchor="ctr" lIns="28800" rIns="28800" tIns="28800" bIns="28800">
             <a:noAutofit/>
           </a:bodyPr>
           <a:lstStyle/>
@@ -40088,13 +40088,13 @@
                 <a:spcPts val="0"/>
               </a:spcBef>
               <a:spcAft>
-                <a:spcPts val="334"/>
+                <a:spcPts val="1800"/>
               </a:spcAft>
               <a:buFont typeface="Segoe UI Symbol"/>
               <a:buChar char="✓"/>
             </a:pPr>
             <a:r>
-              <a:rPr sz="1304" b="0">
+              <a:rPr sz="1450" b="0">
                 <a:solidFill>
                   <a:srgbClr val="1F2A44"/>
                 </a:solidFill>
@@ -40114,13 +40114,13 @@
                 <a:spcPts val="0"/>
               </a:spcBef>
               <a:spcAft>
-                <a:spcPts val="334"/>
+                <a:spcPts val="1800"/>
               </a:spcAft>
               <a:buFont typeface="Segoe UI Symbol"/>
               <a:buChar char="✓"/>
             </a:pPr>
             <a:r>
-              <a:rPr sz="1304" b="0">
+              <a:rPr sz="1450" b="0">
                 <a:solidFill>
                   <a:srgbClr val="1F2A44"/>
                 </a:solidFill>
@@ -40142,7 +40142,7 @@
         <p:spPr>
           <a:xfrm>
             <a:off x="9050400" y="1260000"/>
-            <a:ext cx="2818800" cy="1440000"/>
+            <a:ext cx="2818800" cy="2439722"/>
           </a:xfrm>
           <a:prstGeom prst="roundRect">
             <a:avLst>
@@ -40204,7 +40204,7 @@
           <a:lstStyle/>
           <a:p>
             <a:r>
-              <a:rPr sz="1404" b="1">
+              <a:rPr sz="1550" b="1">
                 <a:solidFill>
                   <a:srgbClr val="1F5FD1"/>
                 </a:solidFill>
@@ -40270,7 +40270,7 @@
         <p:spPr>
           <a:xfrm>
             <a:off x="9104400" y="1584000"/>
-            <a:ext cx="2710800" cy="1080000"/>
+            <a:ext cx="2710800" cy="2079722"/>
           </a:xfrm>
           <a:prstGeom prst="rect">
             <a:avLst/>
@@ -40278,7 +40278,7 @@
           <a:noFill/>
         </p:spPr>
         <p:txBody>
-          <a:bodyPr wrap="square" anchor="t" lIns="28800" rIns="28800" tIns="28800" bIns="28800">
+          <a:bodyPr wrap="square" anchor="ctr" lIns="28800" rIns="28800" tIns="28800" bIns="28800">
             <a:noAutofit/>
           </a:bodyPr>
           <a:lstStyle/>
@@ -40291,13 +40291,13 @@
                 <a:spcPts val="0"/>
               </a:spcBef>
               <a:spcAft>
-                <a:spcPts val="334"/>
+                <a:spcPts val="1800"/>
               </a:spcAft>
               <a:buFont typeface="Segoe UI Symbol"/>
               <a:buChar char="✓"/>
             </a:pPr>
             <a:r>
-              <a:rPr sz="1304" b="0">
+              <a:rPr sz="1450" b="0">
                 <a:solidFill>
                   <a:srgbClr val="1F2A44"/>
                 </a:solidFill>
@@ -40317,13 +40317,13 @@
                 <a:spcPts val="0"/>
               </a:spcBef>
               <a:spcAft>
-                <a:spcPts val="334"/>
+                <a:spcPts val="1800"/>
               </a:spcAft>
               <a:buFont typeface="Segoe UI Symbol"/>
               <a:buChar char="✓"/>
             </a:pPr>
             <a:r>
-              <a:rPr sz="1304" b="0">
+              <a:rPr sz="1450" b="0">
                 <a:solidFill>
                   <a:srgbClr val="1F2A44"/>
                 </a:solidFill>
@@ -40345,8 +40345,8 @@
           <p:nvPr/>
         </p:nvGraphicFramePr>
         <p:xfrm>
-          <a:off x="324000" y="2808000"/>
-          <a:ext cx="11545199" cy="3168000"/>
+          <a:off x="324000" y="3807722"/>
+          <a:ext cx="11545199" cy="2168276"/>
         </p:xfrm>
         <a:graphic>
           <a:graphicData uri="http://schemas.openxmlformats.org/drawingml/2006/table">
@@ -40356,7 +40356,7 @@
                 <a:gridCol w="2770848"/>
                 <a:gridCol w="8774351"/>
               </a:tblGrid>
-              <a:tr h="792000">
+              <a:tr h="542069">
                 <a:tc>
                   <a:txBody>
                     <a:bodyPr wrap="square"/>
@@ -40468,7 +40468,7 @@
                   </a:tcPr>
                 </a:tc>
               </a:tr>
-              <a:tr h="792000">
+              <a:tr h="542069">
                 <a:tc>
                   <a:txBody>
                     <a:bodyPr wrap="square"/>
@@ -40580,7 +40580,7 @@
                   </a:tcPr>
                 </a:tc>
               </a:tr>
-              <a:tr h="792000">
+              <a:tr h="542069">
                 <a:tc>
                   <a:txBody>
                     <a:bodyPr wrap="square"/>
@@ -40692,7 +40692,7 @@
                   </a:tcPr>
                 </a:tc>
               </a:tr>
-              <a:tr h="792000">
+              <a:tr h="542069">
                 <a:tc>
                   <a:txBody>
                     <a:bodyPr wrap="square"/>
@@ -43664,7 +43664,7 @@
           <a:noFill/>
         </p:spPr>
         <p:txBody>
-          <a:bodyPr wrap="square" anchor="t" lIns="43200" rIns="43200" tIns="43200" bIns="43200">
+          <a:bodyPr wrap="square" anchor="ctr" lIns="43200" rIns="43200" tIns="43200" bIns="43200">
             <a:noAutofit/>
           </a:bodyPr>
           <a:lstStyle/>
@@ -43674,7 +43674,7 @@
                 <a:spcPct val="120000"/>
               </a:lnSpc>
               <a:spcBef>
-                <a:spcPts val="1700"/>
+                <a:spcPts val="2700"/>
               </a:spcBef>
               <a:spcAft>
                 <a:spcPts val="0"/>
@@ -43683,7 +43683,7 @@
               <a:buChar char="•"/>
             </a:pPr>
             <a:r>
-              <a:rPr sz="1312" b="1">
+              <a:rPr sz="1500" b="1">
                 <a:solidFill>
                   <a:srgbClr val="1F5FD1"/>
                 </a:solidFill>
@@ -43694,7 +43694,7 @@
               <a:t>① Private AI 인프라</a:t>
             </a:r>
             <a:r>
-              <a:rPr sz="1312" b="0">
+              <a:rPr sz="1500" b="0">
                 <a:solidFill>
                   <a:srgbClr val="1F2A44"/>
                 </a:solidFill>
@@ -43711,7 +43711,7 @@
                 <a:spcPct val="120000"/>
               </a:lnSpc>
               <a:spcBef>
-                <a:spcPts val="1700"/>
+                <a:spcPts val="2700"/>
               </a:spcBef>
               <a:spcAft>
                 <a:spcPts val="0"/>
@@ -43720,7 +43720,7 @@
               <a:buChar char="•"/>
             </a:pPr>
             <a:r>
-              <a:rPr sz="1312" b="1">
+              <a:rPr sz="1500" b="1">
                 <a:solidFill>
                   <a:srgbClr val="1F5FD1"/>
                 </a:solidFill>
@@ -43731,7 +43731,7 @@
               <a:t>② 통합 지식DB</a:t>
             </a:r>
             <a:r>
-              <a:rPr sz="1312" b="0">
+              <a:rPr sz="1500" b="0">
                 <a:solidFill>
                   <a:srgbClr val="1F2A44"/>
                 </a:solidFill>
@@ -43748,7 +43748,7 @@
                 <a:spcPct val="120000"/>
               </a:lnSpc>
               <a:spcBef>
-                <a:spcPts val="1700"/>
+                <a:spcPts val="2700"/>
               </a:spcBef>
               <a:spcAft>
                 <a:spcPts val="0"/>
@@ -43757,7 +43757,7 @@
               <a:buChar char="•"/>
             </a:pPr>
             <a:r>
-              <a:rPr sz="1312" b="1">
+              <a:rPr sz="1500" b="1">
                 <a:solidFill>
                   <a:srgbClr val="1F5FD1"/>
                 </a:solidFill>
@@ -43768,7 +43768,7 @@
               <a:t>③ Agent 스튜디오·포털</a:t>
             </a:r>
             <a:r>
-              <a:rPr sz="1312" b="0">
+              <a:rPr sz="1500" b="0">
                 <a:solidFill>
                   <a:srgbClr val="1F2A44"/>
                 </a:solidFill>
@@ -43785,7 +43785,7 @@
                 <a:spcPct val="120000"/>
               </a:lnSpc>
               <a:spcBef>
-                <a:spcPts val="1700"/>
+                <a:spcPts val="2700"/>
               </a:spcBef>
               <a:spcAft>
                 <a:spcPts val="0"/>
@@ -43794,7 +43794,7 @@
               <a:buChar char="•"/>
             </a:pPr>
             <a:r>
-              <a:rPr sz="1312" b="1">
+              <a:rPr sz="1500" b="1">
                 <a:solidFill>
                   <a:srgbClr val="1F5FD1"/>
                 </a:solidFill>
@@ -43805,7 +43805,7 @@
               <a:t>④ 품질·안정화</a:t>
             </a:r>
             <a:r>
-              <a:rPr sz="1312" b="0">
+              <a:rPr sz="1500" b="0">
                 <a:solidFill>
                   <a:srgbClr val="1F2A44"/>
                 </a:solidFill>
@@ -45496,7 +45496,7 @@
           <a:lstStyle/>
           <a:p>
             <a:r>
-              <a:rPr sz="1450" b="1">
+              <a:rPr sz="1550" b="1">
                 <a:solidFill>
                   <a:srgbClr val="1F5FD1"/>
                 </a:solidFill>
@@ -45570,7 +45570,7 @@
           <a:noFill/>
         </p:spPr>
         <p:txBody>
-          <a:bodyPr wrap="square" anchor="t" lIns="28800" rIns="28800" tIns="28800" bIns="28800">
+          <a:bodyPr wrap="square" anchor="ctr" lIns="28800" rIns="28800" tIns="28800" bIns="28800">
             <a:noAutofit/>
           </a:bodyPr>
           <a:lstStyle/>
@@ -45583,13 +45583,13 @@
                 <a:spcPts val="0"/>
               </a:spcBef>
               <a:spcAft>
-                <a:spcPts val="1000"/>
+                <a:spcPts val="1800"/>
               </a:spcAft>
               <a:buFont typeface="Segoe UI Symbol"/>
               <a:buChar char="✓"/>
             </a:pPr>
             <a:r>
-              <a:rPr sz="1350" b="0">
+              <a:rPr sz="1450" b="0">
                 <a:solidFill>
                   <a:srgbClr val="1F2A44"/>
                 </a:solidFill>
@@ -45609,13 +45609,13 @@
                 <a:spcPts val="0"/>
               </a:spcBef>
               <a:spcAft>
-                <a:spcPts val="1000"/>
+                <a:spcPts val="1800"/>
               </a:spcAft>
               <a:buFont typeface="Segoe UI Symbol"/>
               <a:buChar char="✓"/>
             </a:pPr>
             <a:r>
-              <a:rPr sz="1350" b="0">
+              <a:rPr sz="1450" b="0">
                 <a:solidFill>
                   <a:srgbClr val="1F2A44"/>
                 </a:solidFill>
@@ -45699,7 +45699,7 @@
           <a:lstStyle/>
           <a:p>
             <a:r>
-              <a:rPr sz="1450" b="1">
+              <a:rPr sz="1550" b="1">
                 <a:solidFill>
                   <a:srgbClr val="1F5FD1"/>
                 </a:solidFill>
@@ -45773,7 +45773,7 @@
           <a:noFill/>
         </p:spPr>
         <p:txBody>
-          <a:bodyPr wrap="square" anchor="t" lIns="28800" rIns="28800" tIns="28800" bIns="28800">
+          <a:bodyPr wrap="square" anchor="ctr" lIns="28800" rIns="28800" tIns="28800" bIns="28800">
             <a:noAutofit/>
           </a:bodyPr>
           <a:lstStyle/>
@@ -45786,13 +45786,13 @@
                 <a:spcPts val="0"/>
               </a:spcBef>
               <a:spcAft>
-                <a:spcPts val="1000"/>
+                <a:spcPts val="1800"/>
               </a:spcAft>
               <a:buFont typeface="Segoe UI Symbol"/>
               <a:buChar char="✓"/>
             </a:pPr>
             <a:r>
-              <a:rPr sz="1350" b="0">
+              <a:rPr sz="1450" b="0">
                 <a:solidFill>
                   <a:srgbClr val="1F2A44"/>
                 </a:solidFill>
@@ -45812,13 +45812,13 @@
                 <a:spcPts val="0"/>
               </a:spcBef>
               <a:spcAft>
-                <a:spcPts val="1000"/>
+                <a:spcPts val="1800"/>
               </a:spcAft>
               <a:buFont typeface="Segoe UI Symbol"/>
               <a:buChar char="✓"/>
             </a:pPr>
             <a:r>
-              <a:rPr sz="1350" b="0">
+              <a:rPr sz="1450" b="0">
                 <a:solidFill>
                   <a:srgbClr val="1F2A44"/>
                 </a:solidFill>
@@ -45902,7 +45902,7 @@
           <a:lstStyle/>
           <a:p>
             <a:r>
-              <a:rPr sz="1450" b="1">
+              <a:rPr sz="1550" b="1">
                 <a:solidFill>
                   <a:srgbClr val="1F5FD1"/>
                 </a:solidFill>
@@ -45976,7 +45976,7 @@
           <a:noFill/>
         </p:spPr>
         <p:txBody>
-          <a:bodyPr wrap="square" anchor="t" lIns="28800" rIns="28800" tIns="28800" bIns="28800">
+          <a:bodyPr wrap="square" anchor="ctr" lIns="28800" rIns="28800" tIns="28800" bIns="28800">
             <a:noAutofit/>
           </a:bodyPr>
           <a:lstStyle/>
@@ -45989,13 +45989,13 @@
                 <a:spcPts val="0"/>
               </a:spcBef>
               <a:spcAft>
-                <a:spcPts val="1000"/>
+                <a:spcPts val="1800"/>
               </a:spcAft>
               <a:buFont typeface="Segoe UI Symbol"/>
               <a:buChar char="✓"/>
             </a:pPr>
             <a:r>
-              <a:rPr sz="1350" b="0">
+              <a:rPr sz="1450" b="0">
                 <a:solidFill>
                   <a:srgbClr val="1F2A44"/>
                 </a:solidFill>
@@ -46015,13 +46015,13 @@
                 <a:spcPts val="0"/>
               </a:spcBef>
               <a:spcAft>
-                <a:spcPts val="1000"/>
+                <a:spcPts val="1800"/>
               </a:spcAft>
               <a:buFont typeface="Segoe UI Symbol"/>
               <a:buChar char="✓"/>
             </a:pPr>
             <a:r>
-              <a:rPr sz="1350" b="0">
+              <a:rPr sz="1450" b="0">
                 <a:solidFill>
                   <a:srgbClr val="1F2A44"/>
                 </a:solidFill>
@@ -46105,7 +46105,7 @@
           <a:lstStyle/>
           <a:p>
             <a:r>
-              <a:rPr sz="1450" b="1">
+              <a:rPr sz="1550" b="1">
                 <a:solidFill>
                   <a:srgbClr val="1F5FD1"/>
                 </a:solidFill>
@@ -46179,7 +46179,7 @@
           <a:noFill/>
         </p:spPr>
         <p:txBody>
-          <a:bodyPr wrap="square" anchor="t" lIns="28800" rIns="28800" tIns="28800" bIns="28800">
+          <a:bodyPr wrap="square" anchor="ctr" lIns="28800" rIns="28800" tIns="28800" bIns="28800">
             <a:noAutofit/>
           </a:bodyPr>
           <a:lstStyle/>
@@ -46192,13 +46192,13 @@
                 <a:spcPts val="0"/>
               </a:spcBef>
               <a:spcAft>
-                <a:spcPts val="1000"/>
+                <a:spcPts val="1800"/>
               </a:spcAft>
               <a:buFont typeface="Segoe UI Symbol"/>
               <a:buChar char="✓"/>
             </a:pPr>
             <a:r>
-              <a:rPr sz="1350" b="0">
+              <a:rPr sz="1450" b="0">
                 <a:solidFill>
                   <a:srgbClr val="1F2A44"/>
                 </a:solidFill>
@@ -46218,13 +46218,13 @@
                 <a:spcPts val="0"/>
               </a:spcBef>
               <a:spcAft>
-                <a:spcPts val="1000"/>
+                <a:spcPts val="1800"/>
               </a:spcAft>
               <a:buFont typeface="Segoe UI Symbol"/>
               <a:buChar char="✓"/>
             </a:pPr>
             <a:r>
-              <a:rPr sz="1350" b="0">
+              <a:rPr sz="1450" b="0">
                 <a:solidFill>
                   <a:srgbClr val="1F2A44"/>
                 </a:solidFill>

--- a/proposals/2026-11_induk-ai-infra/발표자료.pptx
+++ b/proposals/2026-11_induk-ai-infra/발표자료.pptx
@@ -4832,7 +4832,7 @@
         <p:spPr>
           <a:xfrm>
             <a:off x="5660181" y="1260000"/>
-            <a:ext cx="1403754" cy="2137888"/>
+            <a:ext cx="1403754" cy="804340"/>
           </a:xfrm>
           <a:prstGeom prst="roundRect">
             <a:avLst>
@@ -4925,7 +4925,7 @@
               </a:spcAft>
             </a:pPr>
             <a:r>
-              <a:rPr sz="1350" b="1">
+              <a:rPr sz="1207" b="1">
                 <a:solidFill>
                   <a:srgbClr val="FFFFFF"/>
                 </a:solidFill>
@@ -4947,7 +4947,7 @@
         <p:spPr>
           <a:xfrm>
             <a:off x="5703381" y="1602000"/>
-            <a:ext cx="1317354" cy="1777888"/>
+            <a:ext cx="1317354" cy="444340"/>
           </a:xfrm>
           <a:prstGeom prst="rect">
             <a:avLst/>
@@ -4972,7 +4972,7 @@
               </a:spcAft>
             </a:pPr>
             <a:r>
-              <a:rPr sz="1300" b="0">
+              <a:rPr sz="1150" b="0">
                 <a:solidFill>
                   <a:srgbClr val="1F2A44"/>
                 </a:solidFill>
@@ -4993,7 +4993,7 @@
         </p:nvSpPr>
         <p:spPr>
           <a:xfrm>
-            <a:off x="7092736" y="2220944"/>
+            <a:off x="7092736" y="1554170"/>
             <a:ext cx="140400" cy="216000"/>
           </a:xfrm>
           <a:prstGeom prst="rightArrow">
@@ -5038,7 +5038,7 @@
         <p:spPr>
           <a:xfrm>
             <a:off x="7261936" y="1260000"/>
-            <a:ext cx="1403754" cy="2137888"/>
+            <a:ext cx="1403754" cy="804340"/>
           </a:xfrm>
           <a:prstGeom prst="roundRect">
             <a:avLst>
@@ -5131,7 +5131,7 @@
               </a:spcAft>
             </a:pPr>
             <a:r>
-              <a:rPr sz="1350" b="1">
+              <a:rPr sz="1207" b="1">
                 <a:solidFill>
                   <a:srgbClr val="FFFFFF"/>
                 </a:solidFill>
@@ -5153,7 +5153,7 @@
         <p:spPr>
           <a:xfrm>
             <a:off x="7305136" y="1602000"/>
-            <a:ext cx="1317354" cy="1777888"/>
+            <a:ext cx="1317354" cy="444340"/>
           </a:xfrm>
           <a:prstGeom prst="rect">
             <a:avLst/>
@@ -5178,7 +5178,7 @@
               </a:spcAft>
             </a:pPr>
             <a:r>
-              <a:rPr sz="1300" b="0">
+              <a:rPr sz="1150" b="0">
                 <a:solidFill>
                   <a:srgbClr val="1F2A44"/>
                 </a:solidFill>
@@ -5199,7 +5199,7 @@
         </p:nvSpPr>
         <p:spPr>
           <a:xfrm>
-            <a:off x="8694490" y="2220944"/>
+            <a:off x="8694490" y="1554170"/>
             <a:ext cx="140400" cy="216000"/>
           </a:xfrm>
           <a:prstGeom prst="rightArrow">
@@ -5244,7 +5244,7 @@
         <p:spPr>
           <a:xfrm>
             <a:off x="8863690" y="1260000"/>
-            <a:ext cx="1403754" cy="2137888"/>
+            <a:ext cx="1403754" cy="804340"/>
           </a:xfrm>
           <a:prstGeom prst="roundRect">
             <a:avLst>
@@ -5337,7 +5337,7 @@
               </a:spcAft>
             </a:pPr>
             <a:r>
-              <a:rPr sz="1350" b="1">
+              <a:rPr sz="1207" b="1">
                 <a:solidFill>
                   <a:srgbClr val="FFFFFF"/>
                 </a:solidFill>
@@ -5359,7 +5359,7 @@
         <p:spPr>
           <a:xfrm>
             <a:off x="8906890" y="1602000"/>
-            <a:ext cx="1317354" cy="1777888"/>
+            <a:ext cx="1317354" cy="444340"/>
           </a:xfrm>
           <a:prstGeom prst="rect">
             <a:avLst/>
@@ -5384,7 +5384,7 @@
               </a:spcAft>
             </a:pPr>
             <a:r>
-              <a:rPr sz="1300" b="0">
+              <a:rPr sz="1150" b="0">
                 <a:solidFill>
                   <a:srgbClr val="1F2A44"/>
                 </a:solidFill>
@@ -5405,7 +5405,7 @@
         </p:nvSpPr>
         <p:spPr>
           <a:xfrm>
-            <a:off x="10296245" y="2220944"/>
+            <a:off x="10296245" y="1554170"/>
             <a:ext cx="140400" cy="216000"/>
           </a:xfrm>
           <a:prstGeom prst="rightArrow">
@@ -5450,7 +5450,7 @@
         <p:spPr>
           <a:xfrm>
             <a:off x="10465445" y="1260000"/>
-            <a:ext cx="1403754" cy="2137888"/>
+            <a:ext cx="1403754" cy="804340"/>
           </a:xfrm>
           <a:prstGeom prst="roundRect">
             <a:avLst>
@@ -5543,7 +5543,7 @@
               </a:spcAft>
             </a:pPr>
             <a:r>
-              <a:rPr sz="1350" b="1">
+              <a:rPr sz="1207" b="1">
                 <a:solidFill>
                   <a:srgbClr val="FFFFFF"/>
                 </a:solidFill>
@@ -5565,7 +5565,7 @@
         <p:spPr>
           <a:xfrm>
             <a:off x="10508645" y="1602000"/>
-            <a:ext cx="1317354" cy="1777888"/>
+            <a:ext cx="1317354" cy="444340"/>
           </a:xfrm>
           <a:prstGeom prst="rect">
             <a:avLst/>
@@ -5590,7 +5590,7 @@
               </a:spcAft>
             </a:pPr>
             <a:r>
-              <a:rPr sz="1300" b="0">
+              <a:rPr sz="1150" b="0">
                 <a:solidFill>
                   <a:srgbClr val="1F2A44"/>
                 </a:solidFill>
@@ -5612,8 +5612,8 @@
           <p:nvPr/>
         </p:nvGraphicFramePr>
         <p:xfrm>
-          <a:off x="5660181" y="3505888"/>
-          <a:ext cx="6209017" cy="2974110"/>
+          <a:off x="5660181" y="2172340"/>
+          <a:ext cx="6209017" cy="4307658"/>
         </p:xfrm>
         <a:graphic>
           <a:graphicData uri="http://schemas.openxmlformats.org/drawingml/2006/table">
@@ -5623,7 +5623,7 @@
                 <a:gridCol w="1602327"/>
                 <a:gridCol w="4606690"/>
               </a:tblGrid>
-              <a:tr h="495685">
+              <a:tr h="717943">
                 <a:tc>
                   <a:txBody>
                     <a:bodyPr wrap="square"/>
@@ -5735,7 +5735,7 @@
                   </a:tcPr>
                 </a:tc>
               </a:tr>
-              <a:tr h="495685">
+              <a:tr h="717943">
                 <a:tc>
                   <a:txBody>
                     <a:bodyPr wrap="square"/>
@@ -5847,7 +5847,7 @@
                   </a:tcPr>
                 </a:tc>
               </a:tr>
-              <a:tr h="495685">
+              <a:tr h="717943">
                 <a:tc>
                   <a:txBody>
                     <a:bodyPr wrap="square"/>
@@ -5970,7 +5970,7 @@
                   </a:tcPr>
                 </a:tc>
               </a:tr>
-              <a:tr h="495685">
+              <a:tr h="717943">
                 <a:tc>
                   <a:txBody>
                     <a:bodyPr wrap="square"/>
@@ -6082,7 +6082,7 @@
                   </a:tcPr>
                 </a:tc>
               </a:tr>
-              <a:tr h="495685">
+              <a:tr h="717943">
                 <a:tc>
                   <a:txBody>
                     <a:bodyPr wrap="square"/>
@@ -6205,7 +6205,7 @@
                   </a:tcPr>
                 </a:tc>
               </a:tr>
-              <a:tr h="495685">
+              <a:tr h="717943">
                 <a:tc>
                   <a:txBody>
                     <a:bodyPr wrap="square"/>
@@ -6866,7 +6866,7 @@
         <p:spPr>
           <a:xfrm>
             <a:off x="324000" y="1260000"/>
-            <a:ext cx="2150640" cy="1931583"/>
+            <a:ext cx="2150640" cy="1007999"/>
           </a:xfrm>
           <a:prstGeom prst="roundRect">
             <a:avLst>
@@ -6959,7 +6959,7 @@
               </a:spcAft>
             </a:pPr>
             <a:r>
-              <a:rPr sz="1415" b="1">
+              <a:rPr sz="1264" b="1">
                 <a:solidFill>
                   <a:srgbClr val="FFFFFF"/>
                 </a:solidFill>
@@ -6981,7 +6981,7 @@
         <p:spPr>
           <a:xfrm>
             <a:off x="367200" y="1602000"/>
-            <a:ext cx="2064240" cy="1571583"/>
+            <a:ext cx="2064240" cy="647999"/>
           </a:xfrm>
           <a:prstGeom prst="rect">
             <a:avLst/>
@@ -7006,7 +7006,7 @@
               </a:spcAft>
             </a:pPr>
             <a:r>
-              <a:rPr sz="1365" b="0">
+              <a:rPr sz="1207" b="0">
                 <a:solidFill>
                   <a:srgbClr val="1F2A44"/>
                 </a:solidFill>
@@ -7027,7 +7027,7 @@
         </p:nvSpPr>
         <p:spPr>
           <a:xfrm>
-            <a:off x="2503440" y="2117791"/>
+            <a:off x="2503440" y="1656000"/>
             <a:ext cx="140400" cy="216000"/>
           </a:xfrm>
           <a:prstGeom prst="rightArrow">
@@ -7072,7 +7072,7 @@
         <p:spPr>
           <a:xfrm>
             <a:off x="2672640" y="1260000"/>
-            <a:ext cx="2150640" cy="1931583"/>
+            <a:ext cx="2150640" cy="1007999"/>
           </a:xfrm>
           <a:prstGeom prst="roundRect">
             <a:avLst>
@@ -7165,7 +7165,7 @@
               </a:spcAft>
             </a:pPr>
             <a:r>
-              <a:rPr sz="1415" b="1">
+              <a:rPr sz="1264" b="1">
                 <a:solidFill>
                   <a:srgbClr val="FFFFFF"/>
                 </a:solidFill>
@@ -7187,7 +7187,7 @@
         <p:spPr>
           <a:xfrm>
             <a:off x="2715840" y="1602000"/>
-            <a:ext cx="2064240" cy="1571583"/>
+            <a:ext cx="2064240" cy="647999"/>
           </a:xfrm>
           <a:prstGeom prst="rect">
             <a:avLst/>
@@ -7212,7 +7212,7 @@
               </a:spcAft>
             </a:pPr>
             <a:r>
-              <a:rPr sz="1365" b="0">
+              <a:rPr sz="1207" b="0">
                 <a:solidFill>
                   <a:srgbClr val="1F2A44"/>
                 </a:solidFill>
@@ -7233,7 +7233,7 @@
         </p:nvSpPr>
         <p:spPr>
           <a:xfrm>
-            <a:off x="4852080" y="2117791"/>
+            <a:off x="4852080" y="1656000"/>
             <a:ext cx="140400" cy="216000"/>
           </a:xfrm>
           <a:prstGeom prst="rightArrow">
@@ -7278,7 +7278,7 @@
         <p:spPr>
           <a:xfrm>
             <a:off x="5021280" y="1260000"/>
-            <a:ext cx="2150640" cy="1931583"/>
+            <a:ext cx="2150640" cy="1007999"/>
           </a:xfrm>
           <a:prstGeom prst="roundRect">
             <a:avLst>
@@ -7371,7 +7371,7 @@
               </a:spcAft>
             </a:pPr>
             <a:r>
-              <a:rPr sz="1415" b="1">
+              <a:rPr sz="1264" b="1">
                 <a:solidFill>
                   <a:srgbClr val="FFFFFF"/>
                 </a:solidFill>
@@ -7393,7 +7393,7 @@
         <p:spPr>
           <a:xfrm>
             <a:off x="5064480" y="1602000"/>
-            <a:ext cx="2064240" cy="1571583"/>
+            <a:ext cx="2064240" cy="647999"/>
           </a:xfrm>
           <a:prstGeom prst="rect">
             <a:avLst/>
@@ -7418,7 +7418,7 @@
               </a:spcAft>
             </a:pPr>
             <a:r>
-              <a:rPr sz="1365" b="0">
+              <a:rPr sz="1207" b="0">
                 <a:solidFill>
                   <a:srgbClr val="1F2A44"/>
                 </a:solidFill>
@@ -7439,7 +7439,7 @@
         </p:nvSpPr>
         <p:spPr>
           <a:xfrm>
-            <a:off x="7200720" y="2117791"/>
+            <a:off x="7200720" y="1656000"/>
             <a:ext cx="140400" cy="216000"/>
           </a:xfrm>
           <a:prstGeom prst="rightArrow">
@@ -7484,7 +7484,7 @@
         <p:spPr>
           <a:xfrm>
             <a:off x="7369919" y="1260000"/>
-            <a:ext cx="2150640" cy="1931583"/>
+            <a:ext cx="2150640" cy="1007999"/>
           </a:xfrm>
           <a:prstGeom prst="roundRect">
             <a:avLst>
@@ -7577,7 +7577,7 @@
               </a:spcAft>
             </a:pPr>
             <a:r>
-              <a:rPr sz="1415" b="1">
+              <a:rPr sz="1264" b="1">
                 <a:solidFill>
                   <a:srgbClr val="FFFFFF"/>
                 </a:solidFill>
@@ -7599,7 +7599,7 @@
         <p:spPr>
           <a:xfrm>
             <a:off x="7413120" y="1602000"/>
-            <a:ext cx="2064240" cy="1571583"/>
+            <a:ext cx="2064240" cy="647999"/>
           </a:xfrm>
           <a:prstGeom prst="rect">
             <a:avLst/>
@@ -7624,7 +7624,7 @@
               </a:spcAft>
             </a:pPr>
             <a:r>
-              <a:rPr sz="1365" b="0">
+              <a:rPr sz="1207" b="0">
                 <a:solidFill>
                   <a:srgbClr val="1F2A44"/>
                 </a:solidFill>
@@ -7645,7 +7645,7 @@
         </p:nvSpPr>
         <p:spPr>
           <a:xfrm>
-            <a:off x="9549359" y="2117791"/>
+            <a:off x="9549359" y="1656000"/>
             <a:ext cx="140400" cy="216000"/>
           </a:xfrm>
           <a:prstGeom prst="rightArrow">
@@ -7690,7 +7690,7 @@
         <p:spPr>
           <a:xfrm>
             <a:off x="9718560" y="1260000"/>
-            <a:ext cx="2150640" cy="1931583"/>
+            <a:ext cx="2150640" cy="1007999"/>
           </a:xfrm>
           <a:prstGeom prst="roundRect">
             <a:avLst>
@@ -7783,7 +7783,7 @@
               </a:spcAft>
             </a:pPr>
             <a:r>
-              <a:rPr sz="1415" b="1">
+              <a:rPr sz="1264" b="1">
                 <a:solidFill>
                   <a:srgbClr val="FFFFFF"/>
                 </a:solidFill>
@@ -7805,7 +7805,7 @@
         <p:spPr>
           <a:xfrm>
             <a:off x="9761760" y="1602000"/>
-            <a:ext cx="2064240" cy="1571583"/>
+            <a:ext cx="2064240" cy="647999"/>
           </a:xfrm>
           <a:prstGeom prst="rect">
             <a:avLst/>
@@ -7830,7 +7830,7 @@
               </a:spcAft>
             </a:pPr>
             <a:r>
-              <a:rPr sz="1365" b="0">
+              <a:rPr sz="1207" b="0">
                 <a:solidFill>
                   <a:srgbClr val="1F2A44"/>
                 </a:solidFill>
@@ -7852,8 +7852,8 @@
           <p:nvPr/>
         </p:nvGraphicFramePr>
         <p:xfrm>
-          <a:off x="324000" y="3299583"/>
-          <a:ext cx="11545200" cy="2676414"/>
+          <a:off x="324000" y="2376000"/>
+          <a:ext cx="11545200" cy="3600000"/>
         </p:xfrm>
         <a:graphic>
           <a:graphicData uri="http://schemas.openxmlformats.org/drawingml/2006/table">
@@ -7863,7 +7863,7 @@
                 <a:gridCol w="2309040"/>
                 <a:gridCol w="9236160"/>
               </a:tblGrid>
-              <a:tr h="446069">
+              <a:tr h="600000">
                 <a:tc>
                   <a:txBody>
                     <a:bodyPr wrap="square"/>
@@ -7975,7 +7975,7 @@
                   </a:tcPr>
                 </a:tc>
               </a:tr>
-              <a:tr h="446069">
+              <a:tr h="600000">
                 <a:tc>
                   <a:txBody>
                     <a:bodyPr wrap="square"/>
@@ -8087,7 +8087,7 @@
                   </a:tcPr>
                 </a:tc>
               </a:tr>
-              <a:tr h="446069">
+              <a:tr h="600000">
                 <a:tc>
                   <a:txBody>
                     <a:bodyPr wrap="square"/>
@@ -8199,7 +8199,7 @@
                   </a:tcPr>
                 </a:tc>
               </a:tr>
-              <a:tr h="446069">
+              <a:tr h="600000">
                 <a:tc>
                   <a:txBody>
                     <a:bodyPr wrap="square"/>
@@ -8311,7 +8311,7 @@
                   </a:tcPr>
                 </a:tc>
               </a:tr>
-              <a:tr h="446069">
+              <a:tr h="600000">
                 <a:tc>
                   <a:txBody>
                     <a:bodyPr wrap="square"/>
@@ -8423,7 +8423,7 @@
                   </a:tcPr>
                 </a:tc>
               </a:tr>
-              <a:tr h="446069">
+              <a:tr h="600000">
                 <a:tc>
                   <a:txBody>
                     <a:bodyPr wrap="square"/>
@@ -9424,7 +9424,7 @@
         </p:nvGraphicFramePr>
         <p:xfrm>
           <a:off x="6267600" y="1638000"/>
-          <a:ext cx="5511599" cy="2585500"/>
+          <a:ext cx="5511599" cy="3798000"/>
         </p:xfrm>
         <a:graphic>
           <a:graphicData uri="http://schemas.openxmlformats.org/drawingml/2006/table">
@@ -9434,7 +9434,7 @@
                 <a:gridCol w="1677443"/>
                 <a:gridCol w="3834156"/>
               </a:tblGrid>
-              <a:tr h="517100">
+              <a:tr h="759600">
                 <a:tc>
                   <a:txBody>
                     <a:bodyPr wrap="square"/>
@@ -9546,7 +9546,7 @@
                   </a:tcPr>
                 </a:tc>
               </a:tr>
-              <a:tr h="517100">
+              <a:tr h="759600">
                 <a:tc>
                   <a:txBody>
                     <a:bodyPr wrap="square"/>
@@ -9658,7 +9658,7 @@
                   </a:tcPr>
                 </a:tc>
               </a:tr>
-              <a:tr h="517100">
+              <a:tr h="759600">
                 <a:tc>
                   <a:txBody>
                     <a:bodyPr wrap="square"/>
@@ -9770,7 +9770,7 @@
                   </a:tcPr>
                 </a:tc>
               </a:tr>
-              <a:tr h="517100">
+              <a:tr h="759600">
                 <a:tc>
                   <a:txBody>
                     <a:bodyPr wrap="square"/>
@@ -9882,7 +9882,7 @@
                   </a:tcPr>
                 </a:tc>
               </a:tr>
-              <a:tr h="517100">
+              <a:tr h="759600">
                 <a:tc>
                   <a:txBody>
                     <a:bodyPr wrap="square"/>
@@ -10006,8 +10006,8 @@
         </p:nvSpPr>
         <p:spPr>
           <a:xfrm>
-            <a:off x="6267600" y="4331504"/>
-            <a:ext cx="1229400" cy="2076495"/>
+            <a:off x="6267600" y="5543999"/>
+            <a:ext cx="1229400" cy="864000"/>
           </a:xfrm>
           <a:prstGeom prst="roundRect">
             <a:avLst>
@@ -10054,7 +10054,7 @@
         </p:nvSpPr>
         <p:spPr>
           <a:xfrm>
-            <a:off x="6267600" y="4331504"/>
+            <a:off x="6267600" y="5543999"/>
             <a:ext cx="1229400" cy="306000"/>
           </a:xfrm>
           <a:prstGeom prst="roundRect">
@@ -10121,8 +10121,8 @@
         </p:nvSpPr>
         <p:spPr>
           <a:xfrm>
-            <a:off x="6310800" y="4673504"/>
-            <a:ext cx="1143000" cy="1716495"/>
+            <a:off x="6310800" y="5885999"/>
+            <a:ext cx="1143000" cy="504000"/>
           </a:xfrm>
           <a:prstGeom prst="rect">
             <a:avLst/>
@@ -10168,7 +10168,7 @@
         </p:nvSpPr>
         <p:spPr>
           <a:xfrm>
-            <a:off x="7525799" y="5261752"/>
+            <a:off x="7525799" y="5868000"/>
             <a:ext cx="140400" cy="216000"/>
           </a:xfrm>
           <a:prstGeom prst="rightArrow">
@@ -10212,8 +10212,8 @@
         </p:nvSpPr>
         <p:spPr>
           <a:xfrm>
-            <a:off x="7695000" y="4331504"/>
-            <a:ext cx="1229400" cy="2076495"/>
+            <a:off x="7695000" y="5543999"/>
+            <a:ext cx="1229400" cy="864000"/>
           </a:xfrm>
           <a:prstGeom prst="roundRect">
             <a:avLst>
@@ -10260,7 +10260,7 @@
         </p:nvSpPr>
         <p:spPr>
           <a:xfrm>
-            <a:off x="7695000" y="4331504"/>
+            <a:off x="7695000" y="5543999"/>
             <a:ext cx="1229400" cy="306000"/>
           </a:xfrm>
           <a:prstGeom prst="roundRect">
@@ -10327,8 +10327,8 @@
         </p:nvSpPr>
         <p:spPr>
           <a:xfrm>
-            <a:off x="7738200" y="4673504"/>
-            <a:ext cx="1143000" cy="1716495"/>
+            <a:off x="7738200" y="5885999"/>
+            <a:ext cx="1143000" cy="504000"/>
           </a:xfrm>
           <a:prstGeom prst="rect">
             <a:avLst/>
@@ -10374,7 +10374,7 @@
         </p:nvSpPr>
         <p:spPr>
           <a:xfrm>
-            <a:off x="8953200" y="5261752"/>
+            <a:off x="8953200" y="5868000"/>
             <a:ext cx="140400" cy="216000"/>
           </a:xfrm>
           <a:prstGeom prst="rightArrow">
@@ -10418,8 +10418,8 @@
         </p:nvSpPr>
         <p:spPr>
           <a:xfrm>
-            <a:off x="9122400" y="4331504"/>
-            <a:ext cx="1229400" cy="2076495"/>
+            <a:off x="9122400" y="5543999"/>
+            <a:ext cx="1229400" cy="864000"/>
           </a:xfrm>
           <a:prstGeom prst="roundRect">
             <a:avLst>
@@ -10466,7 +10466,7 @@
         </p:nvSpPr>
         <p:spPr>
           <a:xfrm>
-            <a:off x="9122400" y="4331504"/>
+            <a:off x="9122400" y="5543999"/>
             <a:ext cx="1229400" cy="306000"/>
           </a:xfrm>
           <a:prstGeom prst="roundRect">
@@ -10533,8 +10533,8 @@
         </p:nvSpPr>
         <p:spPr>
           <a:xfrm>
-            <a:off x="9165600" y="4673504"/>
-            <a:ext cx="1143000" cy="1716495"/>
+            <a:off x="9165600" y="5885999"/>
+            <a:ext cx="1143000" cy="504000"/>
           </a:xfrm>
           <a:prstGeom prst="rect">
             <a:avLst/>
@@ -10580,7 +10580,7 @@
         </p:nvSpPr>
         <p:spPr>
           <a:xfrm>
-            <a:off x="10380599" y="5261752"/>
+            <a:off x="10380599" y="5868000"/>
             <a:ext cx="140400" cy="216000"/>
           </a:xfrm>
           <a:prstGeom prst="rightArrow">
@@ -10624,8 +10624,8 @@
         </p:nvSpPr>
         <p:spPr>
           <a:xfrm>
-            <a:off x="10549800" y="4331504"/>
-            <a:ext cx="1229400" cy="2076495"/>
+            <a:off x="10549800" y="5543999"/>
+            <a:ext cx="1229400" cy="864000"/>
           </a:xfrm>
           <a:prstGeom prst="roundRect">
             <a:avLst>
@@ -10672,7 +10672,7 @@
         </p:nvSpPr>
         <p:spPr>
           <a:xfrm>
-            <a:off x="10549800" y="4331504"/>
+            <a:off x="10549800" y="5543999"/>
             <a:ext cx="1229400" cy="306000"/>
           </a:xfrm>
           <a:prstGeom prst="roundRect">
@@ -10739,8 +10739,8 @@
         </p:nvSpPr>
         <p:spPr>
           <a:xfrm>
-            <a:off x="10593000" y="4673504"/>
-            <a:ext cx="1143000" cy="1716495"/>
+            <a:off x="10593000" y="5885999"/>
+            <a:ext cx="1143000" cy="504000"/>
           </a:xfrm>
           <a:prstGeom prst="rect">
             <a:avLst/>
@@ -13851,7 +13851,7 @@
         <p:spPr>
           <a:xfrm>
             <a:off x="324000" y="1260000"/>
-            <a:ext cx="2150640" cy="2610000"/>
+            <a:ext cx="2150640" cy="637738"/>
           </a:xfrm>
           <a:prstGeom prst="roundRect">
             <a:avLst>
@@ -13944,7 +13944,7 @@
               </a:spcAft>
             </a:pPr>
             <a:r>
-              <a:rPr sz="1415" b="1">
+              <a:rPr sz="1264" b="1">
                 <a:solidFill>
                   <a:srgbClr val="FFFFFF"/>
                 </a:solidFill>
@@ -13966,7 +13966,7 @@
         <p:spPr>
           <a:xfrm>
             <a:off x="367200" y="1602000"/>
-            <a:ext cx="2064240" cy="2250000"/>
+            <a:ext cx="2064240" cy="277738"/>
           </a:xfrm>
           <a:prstGeom prst="rect">
             <a:avLst/>
@@ -13991,7 +13991,7 @@
               </a:spcAft>
             </a:pPr>
             <a:r>
-              <a:rPr sz="1365" b="0">
+              <a:rPr sz="1207" b="0">
                 <a:solidFill>
                   <a:srgbClr val="1F2A44"/>
                 </a:solidFill>
@@ -14012,7 +14012,7 @@
         </p:nvSpPr>
         <p:spPr>
           <a:xfrm>
-            <a:off x="2503440" y="2457000"/>
+            <a:off x="2503440" y="1470869"/>
             <a:ext cx="140400" cy="216000"/>
           </a:xfrm>
           <a:prstGeom prst="rightArrow">
@@ -14057,7 +14057,7 @@
         <p:spPr>
           <a:xfrm>
             <a:off x="2672640" y="1260000"/>
-            <a:ext cx="2150640" cy="2610000"/>
+            <a:ext cx="2150640" cy="637738"/>
           </a:xfrm>
           <a:prstGeom prst="roundRect">
             <a:avLst>
@@ -14150,7 +14150,7 @@
               </a:spcAft>
             </a:pPr>
             <a:r>
-              <a:rPr sz="1415" b="1">
+              <a:rPr sz="1264" b="1">
                 <a:solidFill>
                   <a:srgbClr val="FFFFFF"/>
                 </a:solidFill>
@@ -14172,7 +14172,7 @@
         <p:spPr>
           <a:xfrm>
             <a:off x="2715840" y="1602000"/>
-            <a:ext cx="2064240" cy="2250000"/>
+            <a:ext cx="2064240" cy="277738"/>
           </a:xfrm>
           <a:prstGeom prst="rect">
             <a:avLst/>
@@ -14197,7 +14197,7 @@
               </a:spcAft>
             </a:pPr>
             <a:r>
-              <a:rPr sz="1365" b="0">
+              <a:rPr sz="1207" b="0">
                 <a:solidFill>
                   <a:srgbClr val="1F2A44"/>
                 </a:solidFill>
@@ -14218,7 +14218,7 @@
         </p:nvSpPr>
         <p:spPr>
           <a:xfrm>
-            <a:off x="4852080" y="2457000"/>
+            <a:off x="4852080" y="1470869"/>
             <a:ext cx="140400" cy="216000"/>
           </a:xfrm>
           <a:prstGeom prst="rightArrow">
@@ -14263,7 +14263,7 @@
         <p:spPr>
           <a:xfrm>
             <a:off x="5021280" y="1260000"/>
-            <a:ext cx="2150640" cy="2610000"/>
+            <a:ext cx="2150640" cy="637738"/>
           </a:xfrm>
           <a:prstGeom prst="roundRect">
             <a:avLst>
@@ -14356,7 +14356,7 @@
               </a:spcAft>
             </a:pPr>
             <a:r>
-              <a:rPr sz="1415" b="1">
+              <a:rPr sz="1264" b="1">
                 <a:solidFill>
                   <a:srgbClr val="FFFFFF"/>
                 </a:solidFill>
@@ -14378,7 +14378,7 @@
         <p:spPr>
           <a:xfrm>
             <a:off x="5064480" y="1602000"/>
-            <a:ext cx="2064240" cy="2250000"/>
+            <a:ext cx="2064240" cy="277738"/>
           </a:xfrm>
           <a:prstGeom prst="rect">
             <a:avLst/>
@@ -14403,7 +14403,7 @@
               </a:spcAft>
             </a:pPr>
             <a:r>
-              <a:rPr sz="1365" b="0">
+              <a:rPr sz="1207" b="0">
                 <a:solidFill>
                   <a:srgbClr val="1F2A44"/>
                 </a:solidFill>
@@ -14424,7 +14424,7 @@
         </p:nvSpPr>
         <p:spPr>
           <a:xfrm>
-            <a:off x="7200720" y="2457000"/>
+            <a:off x="7200720" y="1470869"/>
             <a:ext cx="140400" cy="216000"/>
           </a:xfrm>
           <a:prstGeom prst="rightArrow">
@@ -14469,7 +14469,7 @@
         <p:spPr>
           <a:xfrm>
             <a:off x="7369919" y="1260000"/>
-            <a:ext cx="2150640" cy="2610000"/>
+            <a:ext cx="2150640" cy="637738"/>
           </a:xfrm>
           <a:prstGeom prst="roundRect">
             <a:avLst>
@@ -14562,7 +14562,7 @@
               </a:spcAft>
             </a:pPr>
             <a:r>
-              <a:rPr sz="1415" b="1">
+              <a:rPr sz="1264" b="1">
                 <a:solidFill>
                   <a:srgbClr val="FFFFFF"/>
                 </a:solidFill>
@@ -14584,7 +14584,7 @@
         <p:spPr>
           <a:xfrm>
             <a:off x="7413120" y="1602000"/>
-            <a:ext cx="2064240" cy="2250000"/>
+            <a:ext cx="2064240" cy="277738"/>
           </a:xfrm>
           <a:prstGeom prst="rect">
             <a:avLst/>
@@ -14609,7 +14609,7 @@
               </a:spcAft>
             </a:pPr>
             <a:r>
-              <a:rPr sz="1365" b="0">
+              <a:rPr sz="1207" b="0">
                 <a:solidFill>
                   <a:srgbClr val="1F2A44"/>
                 </a:solidFill>
@@ -14630,7 +14630,7 @@
         </p:nvSpPr>
         <p:spPr>
           <a:xfrm>
-            <a:off x="9549359" y="2457000"/>
+            <a:off x="9549359" y="1470869"/>
             <a:ext cx="140400" cy="216000"/>
           </a:xfrm>
           <a:prstGeom prst="rightArrow">
@@ -14675,7 +14675,7 @@
         <p:spPr>
           <a:xfrm>
             <a:off x="9718560" y="1260000"/>
-            <a:ext cx="2150640" cy="2610000"/>
+            <a:ext cx="2150640" cy="637738"/>
           </a:xfrm>
           <a:prstGeom prst="roundRect">
             <a:avLst>
@@ -14768,7 +14768,7 @@
               </a:spcAft>
             </a:pPr>
             <a:r>
-              <a:rPr sz="1415" b="1">
+              <a:rPr sz="1264" b="1">
                 <a:solidFill>
                   <a:srgbClr val="FFFFFF"/>
                 </a:solidFill>
@@ -14790,7 +14790,7 @@
         <p:spPr>
           <a:xfrm>
             <a:off x="9761760" y="1602000"/>
-            <a:ext cx="2064240" cy="2250000"/>
+            <a:ext cx="2064240" cy="277738"/>
           </a:xfrm>
           <a:prstGeom prst="rect">
             <a:avLst/>
@@ -14815,7 +14815,7 @@
               </a:spcAft>
             </a:pPr>
             <a:r>
-              <a:rPr sz="1365" b="0">
+              <a:rPr sz="1207" b="0">
                 <a:solidFill>
                   <a:srgbClr val="1F2A44"/>
                 </a:solidFill>
@@ -14836,8 +14836,8 @@
         </p:nvSpPr>
         <p:spPr>
           <a:xfrm>
-            <a:off x="324000" y="3978000"/>
-            <a:ext cx="2818800" cy="2501999"/>
+            <a:off x="324000" y="2005738"/>
+            <a:ext cx="2818800" cy="4474261"/>
           </a:xfrm>
           <a:prstGeom prst="roundRect">
             <a:avLst>
@@ -14884,7 +14884,7 @@
         </p:nvSpPr>
         <p:spPr>
           <a:xfrm>
-            <a:off x="396000" y="4021200"/>
+            <a:off x="396000" y="2048938"/>
             <a:ext cx="2674800" cy="251999"/>
           </a:xfrm>
           <a:prstGeom prst="rect">
@@ -14920,7 +14920,7 @@
         </p:nvSpPr>
         <p:spPr>
           <a:xfrm>
-            <a:off x="396000" y="4273200"/>
+            <a:off x="396000" y="2300938"/>
             <a:ext cx="2674800" cy="7200"/>
           </a:xfrm>
           <a:prstGeom prst="rect">
@@ -14964,8 +14964,8 @@
         </p:nvSpPr>
         <p:spPr>
           <a:xfrm>
-            <a:off x="378000" y="4302000"/>
-            <a:ext cx="2710800" cy="2141999"/>
+            <a:off x="378000" y="2329738"/>
+            <a:ext cx="2710800" cy="4114261"/>
           </a:xfrm>
           <a:prstGeom prst="rect">
             <a:avLst/>
@@ -15013,8 +15013,8 @@
         </p:nvSpPr>
         <p:spPr>
           <a:xfrm>
-            <a:off x="3232800" y="3978000"/>
-            <a:ext cx="2818800" cy="2501999"/>
+            <a:off x="3232800" y="2005738"/>
+            <a:ext cx="2818800" cy="4474261"/>
           </a:xfrm>
           <a:prstGeom prst="roundRect">
             <a:avLst>
@@ -15061,7 +15061,7 @@
         </p:nvSpPr>
         <p:spPr>
           <a:xfrm>
-            <a:off x="3304800" y="4021200"/>
+            <a:off x="3304800" y="2048938"/>
             <a:ext cx="2674800" cy="251999"/>
           </a:xfrm>
           <a:prstGeom prst="rect">
@@ -15097,7 +15097,7 @@
         </p:nvSpPr>
         <p:spPr>
           <a:xfrm>
-            <a:off x="3304800" y="4273200"/>
+            <a:off x="3304800" y="2300938"/>
             <a:ext cx="2674800" cy="7200"/>
           </a:xfrm>
           <a:prstGeom prst="rect">
@@ -15141,8 +15141,8 @@
         </p:nvSpPr>
         <p:spPr>
           <a:xfrm>
-            <a:off x="3286800" y="4302000"/>
-            <a:ext cx="2710800" cy="2141999"/>
+            <a:off x="3286800" y="2329738"/>
+            <a:ext cx="2710800" cy="4114261"/>
           </a:xfrm>
           <a:prstGeom prst="rect">
             <a:avLst/>
@@ -15216,8 +15216,8 @@
         </p:nvSpPr>
         <p:spPr>
           <a:xfrm>
-            <a:off x="6141600" y="3978000"/>
-            <a:ext cx="2818800" cy="2501999"/>
+            <a:off x="6141600" y="2005738"/>
+            <a:ext cx="2818800" cy="4474261"/>
           </a:xfrm>
           <a:prstGeom prst="roundRect">
             <a:avLst>
@@ -15264,7 +15264,7 @@
         </p:nvSpPr>
         <p:spPr>
           <a:xfrm>
-            <a:off x="6213599" y="4021200"/>
+            <a:off x="6213599" y="2048938"/>
             <a:ext cx="2674800" cy="251999"/>
           </a:xfrm>
           <a:prstGeom prst="rect">
@@ -15300,7 +15300,7 @@
         </p:nvSpPr>
         <p:spPr>
           <a:xfrm>
-            <a:off x="6213599" y="4273200"/>
+            <a:off x="6213599" y="2300938"/>
             <a:ext cx="2674800" cy="7200"/>
           </a:xfrm>
           <a:prstGeom prst="rect">
@@ -15344,8 +15344,8 @@
         </p:nvSpPr>
         <p:spPr>
           <a:xfrm>
-            <a:off x="6195599" y="4302000"/>
-            <a:ext cx="2710800" cy="2141999"/>
+            <a:off x="6195599" y="2329738"/>
+            <a:ext cx="2710800" cy="4114261"/>
           </a:xfrm>
           <a:prstGeom prst="rect">
             <a:avLst/>
@@ -15419,8 +15419,8 @@
         </p:nvSpPr>
         <p:spPr>
           <a:xfrm>
-            <a:off x="9050400" y="3978000"/>
-            <a:ext cx="2818800" cy="2501999"/>
+            <a:off x="9050400" y="2005738"/>
+            <a:ext cx="2818800" cy="4474261"/>
           </a:xfrm>
           <a:prstGeom prst="roundRect">
             <a:avLst>
@@ -15467,7 +15467,7 @@
         </p:nvSpPr>
         <p:spPr>
           <a:xfrm>
-            <a:off x="9122400" y="4021200"/>
+            <a:off x="9122400" y="2048938"/>
             <a:ext cx="2674800" cy="251999"/>
           </a:xfrm>
           <a:prstGeom prst="rect">
@@ -15503,7 +15503,7 @@
         </p:nvSpPr>
         <p:spPr>
           <a:xfrm>
-            <a:off x="9122400" y="4273200"/>
+            <a:off x="9122400" y="2300938"/>
             <a:ext cx="2674800" cy="7200"/>
           </a:xfrm>
           <a:prstGeom prst="rect">
@@ -15547,8 +15547,8 @@
         </p:nvSpPr>
         <p:spPr>
           <a:xfrm>
-            <a:off x="9104400" y="4302000"/>
-            <a:ext cx="2710800" cy="2141999"/>
+            <a:off x="9104400" y="2329738"/>
+            <a:ext cx="2710800" cy="4114261"/>
           </a:xfrm>
           <a:prstGeom prst="rect">
             <a:avLst/>
@@ -18824,7 +18824,7 @@
         <p:spPr>
           <a:xfrm>
             <a:off x="324000" y="1260000"/>
-            <a:ext cx="2150640" cy="2041652"/>
+            <a:ext cx="2150640" cy="936000"/>
           </a:xfrm>
           <a:prstGeom prst="roundRect">
             <a:avLst>
@@ -18917,7 +18917,7 @@
               </a:spcAft>
             </a:pPr>
             <a:r>
-              <a:rPr sz="1415" b="1">
+              <a:rPr sz="1264" b="1">
                 <a:solidFill>
                   <a:srgbClr val="FFFFFF"/>
                 </a:solidFill>
@@ -18939,7 +18939,7 @@
         <p:spPr>
           <a:xfrm>
             <a:off x="367200" y="1602000"/>
-            <a:ext cx="2064240" cy="1681652"/>
+            <a:ext cx="2064240" cy="576000"/>
           </a:xfrm>
           <a:prstGeom prst="rect">
             <a:avLst/>
@@ -18964,7 +18964,7 @@
               </a:spcAft>
             </a:pPr>
             <a:r>
-              <a:rPr sz="1365" b="0">
+              <a:rPr sz="1207" b="0">
                 <a:solidFill>
                   <a:srgbClr val="1F2A44"/>
                 </a:solidFill>
@@ -18985,7 +18985,7 @@
         </p:nvSpPr>
         <p:spPr>
           <a:xfrm>
-            <a:off x="2503440" y="2172826"/>
+            <a:off x="2503440" y="1620000"/>
             <a:ext cx="140400" cy="216000"/>
           </a:xfrm>
           <a:prstGeom prst="rightArrow">
@@ -19030,7 +19030,7 @@
         <p:spPr>
           <a:xfrm>
             <a:off x="2672640" y="1260000"/>
-            <a:ext cx="2150640" cy="2041652"/>
+            <a:ext cx="2150640" cy="936000"/>
           </a:xfrm>
           <a:prstGeom prst="roundRect">
             <a:avLst>
@@ -19123,7 +19123,7 @@
               </a:spcAft>
             </a:pPr>
             <a:r>
-              <a:rPr sz="1415" b="1">
+              <a:rPr sz="1264" b="1">
                 <a:solidFill>
                   <a:srgbClr val="FFFFFF"/>
                 </a:solidFill>
@@ -19145,7 +19145,7 @@
         <p:spPr>
           <a:xfrm>
             <a:off x="2715840" y="1602000"/>
-            <a:ext cx="2064240" cy="1681652"/>
+            <a:ext cx="2064240" cy="576000"/>
           </a:xfrm>
           <a:prstGeom prst="rect">
             <a:avLst/>
@@ -19170,7 +19170,7 @@
               </a:spcAft>
             </a:pPr>
             <a:r>
-              <a:rPr sz="1365" b="0">
+              <a:rPr sz="1207" b="0">
                 <a:solidFill>
                   <a:srgbClr val="1F2A44"/>
                 </a:solidFill>
@@ -19191,7 +19191,7 @@
         </p:nvSpPr>
         <p:spPr>
           <a:xfrm>
-            <a:off x="4852080" y="2172826"/>
+            <a:off x="4852080" y="1620000"/>
             <a:ext cx="140400" cy="216000"/>
           </a:xfrm>
           <a:prstGeom prst="rightArrow">
@@ -19236,7 +19236,7 @@
         <p:spPr>
           <a:xfrm>
             <a:off x="5021280" y="1260000"/>
-            <a:ext cx="2150640" cy="2041652"/>
+            <a:ext cx="2150640" cy="936000"/>
           </a:xfrm>
           <a:prstGeom prst="roundRect">
             <a:avLst>
@@ -19329,7 +19329,7 @@
               </a:spcAft>
             </a:pPr>
             <a:r>
-              <a:rPr sz="1415" b="1">
+              <a:rPr sz="1264" b="1">
                 <a:solidFill>
                   <a:srgbClr val="FFFFFF"/>
                 </a:solidFill>
@@ -19351,7 +19351,7 @@
         <p:spPr>
           <a:xfrm>
             <a:off x="5064480" y="1602000"/>
-            <a:ext cx="2064240" cy="1681652"/>
+            <a:ext cx="2064240" cy="576000"/>
           </a:xfrm>
           <a:prstGeom prst="rect">
             <a:avLst/>
@@ -19376,7 +19376,7 @@
               </a:spcAft>
             </a:pPr>
             <a:r>
-              <a:rPr sz="1365" b="0">
+              <a:rPr sz="1207" b="0">
                 <a:solidFill>
                   <a:srgbClr val="1F2A44"/>
                 </a:solidFill>
@@ -19397,7 +19397,7 @@
         </p:nvSpPr>
         <p:spPr>
           <a:xfrm>
-            <a:off x="7200720" y="2172826"/>
+            <a:off x="7200720" y="1620000"/>
             <a:ext cx="140400" cy="216000"/>
           </a:xfrm>
           <a:prstGeom prst="rightArrow">
@@ -19442,7 +19442,7 @@
         <p:spPr>
           <a:xfrm>
             <a:off x="7369919" y="1260000"/>
-            <a:ext cx="2150640" cy="2041652"/>
+            <a:ext cx="2150640" cy="936000"/>
           </a:xfrm>
           <a:prstGeom prst="roundRect">
             <a:avLst>
@@ -19535,7 +19535,7 @@
               </a:spcAft>
             </a:pPr>
             <a:r>
-              <a:rPr sz="1415" b="1">
+              <a:rPr sz="1264" b="1">
                 <a:solidFill>
                   <a:srgbClr val="FFFFFF"/>
                 </a:solidFill>
@@ -19557,7 +19557,7 @@
         <p:spPr>
           <a:xfrm>
             <a:off x="7413120" y="1602000"/>
-            <a:ext cx="2064240" cy="1681652"/>
+            <a:ext cx="2064240" cy="576000"/>
           </a:xfrm>
           <a:prstGeom prst="rect">
             <a:avLst/>
@@ -19582,7 +19582,7 @@
               </a:spcAft>
             </a:pPr>
             <a:r>
-              <a:rPr sz="1365" b="0">
+              <a:rPr sz="1207" b="0">
                 <a:solidFill>
                   <a:srgbClr val="1F2A44"/>
                 </a:solidFill>
@@ -19603,7 +19603,7 @@
         </p:nvSpPr>
         <p:spPr>
           <a:xfrm>
-            <a:off x="9549359" y="2172826"/>
+            <a:off x="9549359" y="1620000"/>
             <a:ext cx="140400" cy="216000"/>
           </a:xfrm>
           <a:prstGeom prst="rightArrow">
@@ -19648,7 +19648,7 @@
         <p:spPr>
           <a:xfrm>
             <a:off x="9718560" y="1260000"/>
-            <a:ext cx="2150640" cy="2041652"/>
+            <a:ext cx="2150640" cy="936000"/>
           </a:xfrm>
           <a:prstGeom prst="roundRect">
             <a:avLst>
@@ -19741,7 +19741,7 @@
               </a:spcAft>
             </a:pPr>
             <a:r>
-              <a:rPr sz="1415" b="1">
+              <a:rPr sz="1264" b="1">
                 <a:solidFill>
                   <a:srgbClr val="FFFFFF"/>
                 </a:solidFill>
@@ -19763,7 +19763,7 @@
         <p:spPr>
           <a:xfrm>
             <a:off x="9761760" y="1602000"/>
-            <a:ext cx="2064240" cy="1681652"/>
+            <a:ext cx="2064240" cy="576000"/>
           </a:xfrm>
           <a:prstGeom prst="rect">
             <a:avLst/>
@@ -19788,7 +19788,7 @@
               </a:spcAft>
             </a:pPr>
             <a:r>
-              <a:rPr sz="1365" b="0">
+              <a:rPr sz="1207" b="0">
                 <a:solidFill>
                   <a:srgbClr val="1F2A44"/>
                 </a:solidFill>
@@ -19810,8 +19810,8 @@
           <p:nvPr/>
         </p:nvGraphicFramePr>
         <p:xfrm>
-          <a:off x="324000" y="3409652"/>
-          <a:ext cx="11545199" cy="2566345"/>
+          <a:off x="324000" y="2304000"/>
+          <a:ext cx="11545199" cy="3672000"/>
         </p:xfrm>
         <a:graphic>
           <a:graphicData uri="http://schemas.openxmlformats.org/drawingml/2006/table">
@@ -19822,7 +19822,7 @@
                 <a:gridCol w="5772600"/>
                 <a:gridCol w="3463559"/>
               </a:tblGrid>
-              <a:tr h="513269">
+              <a:tr h="734400">
                 <a:tc>
                   <a:txBody>
                     <a:bodyPr wrap="square"/>
@@ -19989,7 +19989,7 @@
                   </a:tcPr>
                 </a:tc>
               </a:tr>
-              <a:tr h="513269">
+              <a:tr h="734400">
                 <a:tc>
                   <a:txBody>
                     <a:bodyPr wrap="square"/>
@@ -20156,7 +20156,7 @@
                   </a:tcPr>
                 </a:tc>
               </a:tr>
-              <a:tr h="513269">
+              <a:tr h="734400">
                 <a:tc>
                   <a:txBody>
                     <a:bodyPr wrap="square"/>
@@ -20323,7 +20323,7 @@
                   </a:tcPr>
                 </a:tc>
               </a:tr>
-              <a:tr h="513269">
+              <a:tr h="734400">
                 <a:tc>
                   <a:txBody>
                     <a:bodyPr wrap="square"/>
@@ -20490,7 +20490,7 @@
                   </a:tcPr>
                 </a:tc>
               </a:tr>
-              <a:tr h="513269">
+              <a:tr h="734400">
                 <a:tc>
                   <a:txBody>
                     <a:bodyPr wrap="square"/>
@@ -26483,7 +26483,7 @@
                 </a:tc>
               </a:tr>
               <a:tr h="324000">
-                <a:tc>
+                <a:tc rowSpan="2">
                   <a:txBody>
                     <a:bodyPr wrap="square"/>
                     <a:lstStyle/>
@@ -26760,7 +26760,7 @@
                 </a:tc>
               </a:tr>
               <a:tr h="324000">
-                <a:tc>
+                <a:tc vMerge="1">
                   <a:txBody>
                     <a:bodyPr wrap="square"/>
                     <a:lstStyle/>
@@ -37383,7 +37383,7 @@
         <p:spPr>
           <a:xfrm>
             <a:off x="324000" y="1260000"/>
-            <a:ext cx="2818800" cy="2628000"/>
+            <a:ext cx="2818800" cy="3744000"/>
           </a:xfrm>
           <a:prstGeom prst="roundRect">
             <a:avLst>
@@ -37511,7 +37511,7 @@
         <p:spPr>
           <a:xfrm>
             <a:off x="378000" y="1584000"/>
-            <a:ext cx="2710800" cy="2268000"/>
+            <a:ext cx="2710800" cy="3384000"/>
           </a:xfrm>
           <a:prstGeom prst="rect">
             <a:avLst/>
@@ -37608,7 +37608,7 @@
         <p:spPr>
           <a:xfrm>
             <a:off x="3232800" y="1260000"/>
-            <a:ext cx="2818800" cy="2628000"/>
+            <a:ext cx="2818800" cy="3744000"/>
           </a:xfrm>
           <a:prstGeom prst="roundRect">
             <a:avLst>
@@ -37736,7 +37736,7 @@
         <p:spPr>
           <a:xfrm>
             <a:off x="3286800" y="1584000"/>
-            <a:ext cx="2710800" cy="2268000"/>
+            <a:ext cx="2710800" cy="3384000"/>
           </a:xfrm>
           <a:prstGeom prst="rect">
             <a:avLst/>
@@ -37811,7 +37811,7 @@
         <p:spPr>
           <a:xfrm>
             <a:off x="6141600" y="1260000"/>
-            <a:ext cx="2818800" cy="2628000"/>
+            <a:ext cx="2818800" cy="3744000"/>
           </a:xfrm>
           <a:prstGeom prst="roundRect">
             <a:avLst>
@@ -37939,7 +37939,7 @@
         <p:spPr>
           <a:xfrm>
             <a:off x="6195599" y="1584000"/>
-            <a:ext cx="2710800" cy="2268000"/>
+            <a:ext cx="2710800" cy="3384000"/>
           </a:xfrm>
           <a:prstGeom prst="rect">
             <a:avLst/>
@@ -38014,7 +38014,7 @@
         <p:spPr>
           <a:xfrm>
             <a:off x="9050400" y="1260000"/>
-            <a:ext cx="2818800" cy="2628000"/>
+            <a:ext cx="2818800" cy="3744000"/>
           </a:xfrm>
           <a:prstGeom prst="roundRect">
             <a:avLst>
@@ -38142,7 +38142,7 @@
         <p:spPr>
           <a:xfrm>
             <a:off x="9104400" y="1584000"/>
-            <a:ext cx="2710800" cy="2268000"/>
+            <a:ext cx="2710800" cy="3384000"/>
           </a:xfrm>
           <a:prstGeom prst="rect">
             <a:avLst/>
@@ -38227,8 +38227,8 @@
         </p:nvSpPr>
         <p:spPr>
           <a:xfrm>
-            <a:off x="324000" y="3996000"/>
-            <a:ext cx="2737800" cy="1980000"/>
+            <a:off x="324000" y="5112000"/>
+            <a:ext cx="2737800" cy="863999"/>
           </a:xfrm>
           <a:prstGeom prst="roundRect">
             <a:avLst>
@@ -38275,7 +38275,7 @@
         </p:nvSpPr>
         <p:spPr>
           <a:xfrm>
-            <a:off x="324000" y="3996000"/>
+            <a:off x="324000" y="5112000"/>
             <a:ext cx="2737800" cy="306000"/>
           </a:xfrm>
           <a:prstGeom prst="roundRect">
@@ -38342,8 +38342,8 @@
         </p:nvSpPr>
         <p:spPr>
           <a:xfrm>
-            <a:off x="367200" y="4338000"/>
-            <a:ext cx="2651400" cy="1620000"/>
+            <a:off x="367200" y="5454000"/>
+            <a:ext cx="2651400" cy="503999"/>
           </a:xfrm>
           <a:prstGeom prst="rect">
             <a:avLst/>
@@ -38389,7 +38389,7 @@
         </p:nvSpPr>
         <p:spPr>
           <a:xfrm>
-            <a:off x="3090600" y="4878000"/>
+            <a:off x="3090600" y="5436000"/>
             <a:ext cx="140400" cy="216000"/>
           </a:xfrm>
           <a:prstGeom prst="rightArrow">
@@ -38433,8 +38433,8 @@
         </p:nvSpPr>
         <p:spPr>
           <a:xfrm>
-            <a:off x="3259800" y="3996000"/>
-            <a:ext cx="2737800" cy="1980000"/>
+            <a:off x="3259800" y="5112000"/>
+            <a:ext cx="2737800" cy="863999"/>
           </a:xfrm>
           <a:prstGeom prst="roundRect">
             <a:avLst>
@@ -38481,7 +38481,7 @@
         </p:nvSpPr>
         <p:spPr>
           <a:xfrm>
-            <a:off x="3259800" y="3996000"/>
+            <a:off x="3259800" y="5112000"/>
             <a:ext cx="2737800" cy="306000"/>
           </a:xfrm>
           <a:prstGeom prst="roundRect">
@@ -38548,8 +38548,8 @@
         </p:nvSpPr>
         <p:spPr>
           <a:xfrm>
-            <a:off x="3303000" y="4338000"/>
-            <a:ext cx="2651400" cy="1620000"/>
+            <a:off x="3303000" y="5454000"/>
+            <a:ext cx="2651400" cy="503999"/>
           </a:xfrm>
           <a:prstGeom prst="rect">
             <a:avLst/>
@@ -38595,7 +38595,7 @@
         </p:nvSpPr>
         <p:spPr>
           <a:xfrm>
-            <a:off x="6026400" y="4878000"/>
+            <a:off x="6026400" y="5436000"/>
             <a:ext cx="140400" cy="216000"/>
           </a:xfrm>
           <a:prstGeom prst="rightArrow">
@@ -38639,8 +38639,8 @@
         </p:nvSpPr>
         <p:spPr>
           <a:xfrm>
-            <a:off x="6195600" y="3996000"/>
-            <a:ext cx="2737800" cy="1980000"/>
+            <a:off x="6195600" y="5112000"/>
+            <a:ext cx="2737800" cy="863999"/>
           </a:xfrm>
           <a:prstGeom prst="roundRect">
             <a:avLst>
@@ -38687,7 +38687,7 @@
         </p:nvSpPr>
         <p:spPr>
           <a:xfrm>
-            <a:off x="6195600" y="3996000"/>
+            <a:off x="6195600" y="5112000"/>
             <a:ext cx="2737800" cy="306000"/>
           </a:xfrm>
           <a:prstGeom prst="roundRect">
@@ -38754,8 +38754,8 @@
         </p:nvSpPr>
         <p:spPr>
           <a:xfrm>
-            <a:off x="6238800" y="4338000"/>
-            <a:ext cx="2651400" cy="1620000"/>
+            <a:off x="6238800" y="5454000"/>
+            <a:ext cx="2651400" cy="503999"/>
           </a:xfrm>
           <a:prstGeom prst="rect">
             <a:avLst/>
@@ -38801,7 +38801,7 @@
         </p:nvSpPr>
         <p:spPr>
           <a:xfrm>
-            <a:off x="8962200" y="4878000"/>
+            <a:off x="8962200" y="5436000"/>
             <a:ext cx="140400" cy="216000"/>
           </a:xfrm>
           <a:prstGeom prst="rightArrow">
@@ -38845,8 +38845,8 @@
         </p:nvSpPr>
         <p:spPr>
           <a:xfrm>
-            <a:off x="9131400" y="3996000"/>
-            <a:ext cx="2737800" cy="1980000"/>
+            <a:off x="9131400" y="5112000"/>
+            <a:ext cx="2737800" cy="863999"/>
           </a:xfrm>
           <a:prstGeom prst="roundRect">
             <a:avLst>
@@ -38893,7 +38893,7 @@
         </p:nvSpPr>
         <p:spPr>
           <a:xfrm>
-            <a:off x="9131400" y="3996000"/>
+            <a:off x="9131400" y="5112000"/>
             <a:ext cx="2737800" cy="306000"/>
           </a:xfrm>
           <a:prstGeom prst="roundRect">
@@ -38960,8 +38960,8 @@
         </p:nvSpPr>
         <p:spPr>
           <a:xfrm>
-            <a:off x="9174600" y="4338000"/>
-            <a:ext cx="2651400" cy="1620000"/>
+            <a:off x="9174600" y="5454000"/>
+            <a:ext cx="2651400" cy="503999"/>
           </a:xfrm>
           <a:prstGeom prst="rect">
             <a:avLst/>
